--- a/docs/plots/carbo/jx_carbo_adjcif_sideeffect.pptx
+++ b/docs/plots/carbo/jx_carbo_adjcif_sideeffect.pptx
@@ -2271,7 +2271,7 @@
           </p:nvSpPr>
           <p:spPr>
             <a:xfrm>
-              <a:off x="910695" y="5161310"/>
+              <a:off x="910695" y="5119079"/>
               <a:ext cx="7706515" cy="0"/>
             </a:xfrm>
             <a:custGeom>
@@ -2314,7 +2314,7 @@
           </p:nvSpPr>
           <p:spPr>
             <a:xfrm>
-              <a:off x="910695" y="4323087"/>
+              <a:off x="910695" y="4196392"/>
               <a:ext cx="7706515" cy="0"/>
             </a:xfrm>
             <a:custGeom>
@@ -2357,7 +2357,7 @@
           </p:nvSpPr>
           <p:spPr>
             <a:xfrm>
-              <a:off x="910695" y="3484864"/>
+              <a:off x="910695" y="3273706"/>
               <a:ext cx="7706515" cy="0"/>
             </a:xfrm>
             <a:custGeom>
@@ -2400,21 +2400,21 @@
           </p:nvSpPr>
           <p:spPr>
             <a:xfrm>
-              <a:off x="910695" y="2646641"/>
-              <a:ext cx="7706515" cy="0"/>
+              <a:off x="1914877" y="2583293"/>
+              <a:ext cx="0" cy="3139848"/>
             </a:xfrm>
             <a:custGeom>
               <a:avLst/>
               <a:pathLst>
-                <a:path w="7706515" h="0">
+                <a:path w="0" h="3139848">
                   <a:moveTo>
+                    <a:pt x="0" y="3139848"/>
+                  </a:moveTo>
+                  <a:lnTo>
                     <a:pt x="0" y="0"/>
-                  </a:moveTo>
-                  <a:lnTo>
-                    <a:pt x="7706515" y="0"/>
-                  </a:lnTo>
-                  <a:lnTo>
-                    <a:pt x="7706515" y="0"/>
+                  </a:lnTo>
+                  <a:lnTo>
+                    <a:pt x="0" y="0"/>
                   </a:lnTo>
                 </a:path>
               </a:pathLst>
@@ -2443,7 +2443,7 @@
           </p:nvSpPr>
           <p:spPr>
             <a:xfrm>
-              <a:off x="1914877" y="2583293"/>
+              <a:off x="3783123" y="2583293"/>
               <a:ext cx="0" cy="3139848"/>
             </a:xfrm>
             <a:custGeom>
@@ -2486,7 +2486,7 @@
           </p:nvSpPr>
           <p:spPr>
             <a:xfrm>
-              <a:off x="3783123" y="2583293"/>
+              <a:off x="5651370" y="2583293"/>
               <a:ext cx="0" cy="3139848"/>
             </a:xfrm>
             <a:custGeom>
@@ -2529,7 +2529,7 @@
           </p:nvSpPr>
           <p:spPr>
             <a:xfrm>
-              <a:off x="5651370" y="2583293"/>
+              <a:off x="7519616" y="2583293"/>
               <a:ext cx="0" cy="3139848"/>
             </a:xfrm>
             <a:custGeom>
@@ -2572,26 +2572,26 @@
           </p:nvSpPr>
           <p:spPr>
             <a:xfrm>
-              <a:off x="7519616" y="2583293"/>
-              <a:ext cx="0" cy="3139848"/>
+              <a:off x="910695" y="5580422"/>
+              <a:ext cx="7706515" cy="0"/>
             </a:xfrm>
             <a:custGeom>
               <a:avLst/>
               <a:pathLst>
-                <a:path w="0" h="3139848">
+                <a:path w="7706515" h="0">
                   <a:moveTo>
-                    <a:pt x="0" y="3139848"/>
+                    <a:pt x="0" y="0"/>
                   </a:moveTo>
                   <a:lnTo>
-                    <a:pt x="0" y="0"/>
-                  </a:lnTo>
-                  <a:lnTo>
-                    <a:pt x="0" y="0"/>
+                    <a:pt x="7706515" y="0"/>
+                  </a:lnTo>
+                  <a:lnTo>
+                    <a:pt x="7706515" y="0"/>
                   </a:lnTo>
                 </a:path>
               </a:pathLst>
             </a:custGeom>
-            <a:ln w="6775" cap="flat">
+            <a:ln w="13550" cap="flat">
               <a:solidFill>
                 <a:srgbClr val="EBEBEB">
                   <a:alpha val="100000"/>
@@ -2615,7 +2615,7 @@
           </p:nvSpPr>
           <p:spPr>
             <a:xfrm>
-              <a:off x="910695" y="5580422"/>
+              <a:off x="910695" y="4657735"/>
               <a:ext cx="7706515" cy="0"/>
             </a:xfrm>
             <a:custGeom>
@@ -2658,7 +2658,7 @@
           </p:nvSpPr>
           <p:spPr>
             <a:xfrm>
-              <a:off x="910695" y="4742199"/>
+              <a:off x="910695" y="3735049"/>
               <a:ext cx="7706515" cy="0"/>
             </a:xfrm>
             <a:custGeom>
@@ -2701,7 +2701,7 @@
           </p:nvSpPr>
           <p:spPr>
             <a:xfrm>
-              <a:off x="910695" y="3903976"/>
+              <a:off x="910695" y="2812362"/>
               <a:ext cx="7706515" cy="0"/>
             </a:xfrm>
             <a:custGeom>
@@ -2744,21 +2744,21 @@
           </p:nvSpPr>
           <p:spPr>
             <a:xfrm>
-              <a:off x="910695" y="3065753"/>
-              <a:ext cx="7706515" cy="0"/>
+              <a:off x="980754" y="2583293"/>
+              <a:ext cx="0" cy="3139848"/>
             </a:xfrm>
             <a:custGeom>
               <a:avLst/>
               <a:pathLst>
-                <a:path w="7706515" h="0">
+                <a:path w="0" h="3139848">
                   <a:moveTo>
+                    <a:pt x="0" y="3139848"/>
+                  </a:moveTo>
+                  <a:lnTo>
                     <a:pt x="0" y="0"/>
-                  </a:moveTo>
-                  <a:lnTo>
-                    <a:pt x="7706515" y="0"/>
-                  </a:lnTo>
-                  <a:lnTo>
-                    <a:pt x="7706515" y="0"/>
+                  </a:lnTo>
+                  <a:lnTo>
+                    <a:pt x="0" y="0"/>
                   </a:lnTo>
                 </a:path>
               </a:pathLst>
@@ -2787,7 +2787,7 @@
           </p:nvSpPr>
           <p:spPr>
             <a:xfrm>
-              <a:off x="980754" y="2583293"/>
+              <a:off x="2849000" y="2583293"/>
               <a:ext cx="0" cy="3139848"/>
             </a:xfrm>
             <a:custGeom>
@@ -2830,7 +2830,7 @@
           </p:nvSpPr>
           <p:spPr>
             <a:xfrm>
-              <a:off x="2849000" y="2583293"/>
+              <a:off x="4717246" y="2583293"/>
               <a:ext cx="0" cy="3139848"/>
             </a:xfrm>
             <a:custGeom>
@@ -2873,7 +2873,7 @@
           </p:nvSpPr>
           <p:spPr>
             <a:xfrm>
-              <a:off x="4717246" y="2583293"/>
+              <a:off x="6585493" y="2583293"/>
               <a:ext cx="0" cy="3139848"/>
             </a:xfrm>
             <a:custGeom>
@@ -2916,7 +2916,7 @@
           </p:nvSpPr>
           <p:spPr>
             <a:xfrm>
-              <a:off x="6585493" y="2583293"/>
+              <a:off x="8453739" y="2583293"/>
               <a:ext cx="0" cy="3139848"/>
             </a:xfrm>
             <a:custGeom>
@@ -2959,28 +2959,100 @@
           </p:nvSpPr>
           <p:spPr>
             <a:xfrm>
-              <a:off x="8453739" y="2583293"/>
-              <a:ext cx="0" cy="3139848"/>
+              <a:off x="1260991" y="4626027"/>
+              <a:ext cx="7005923" cy="872223"/>
             </a:xfrm>
             <a:custGeom>
               <a:avLst/>
               <a:pathLst>
-                <a:path w="0" h="3139848">
+                <a:path w="7005923" h="872223">
                   <a:moveTo>
-                    <a:pt x="0" y="3139848"/>
+                    <a:pt x="0" y="872223"/>
                   </a:moveTo>
                   <a:lnTo>
-                    <a:pt x="0" y="0"/>
-                  </a:lnTo>
-                  <a:lnTo>
-                    <a:pt x="0" y="0"/>
+                    <a:pt x="280236" y="872223"/>
+                  </a:lnTo>
+                  <a:lnTo>
+                    <a:pt x="280236" y="829618"/>
+                  </a:lnTo>
+                  <a:lnTo>
+                    <a:pt x="373649" y="829618"/>
+                  </a:lnTo>
+                  <a:lnTo>
+                    <a:pt x="373649" y="703022"/>
+                  </a:lnTo>
+                  <a:lnTo>
+                    <a:pt x="560473" y="703022"/>
+                  </a:lnTo>
+                  <a:lnTo>
+                    <a:pt x="560473" y="615195"/>
+                  </a:lnTo>
+                  <a:lnTo>
+                    <a:pt x="840710" y="615195"/>
+                  </a:lnTo>
+                  <a:lnTo>
+                    <a:pt x="840710" y="570917"/>
+                  </a:lnTo>
+                  <a:lnTo>
+                    <a:pt x="934123" y="570917"/>
+                  </a:lnTo>
+                  <a:lnTo>
+                    <a:pt x="934123" y="480465"/>
+                  </a:lnTo>
+                  <a:lnTo>
+                    <a:pt x="1494596" y="480465"/>
+                  </a:lnTo>
+                  <a:lnTo>
+                    <a:pt x="1494596" y="387757"/>
+                  </a:lnTo>
+                  <a:lnTo>
+                    <a:pt x="2335307" y="387757"/>
+                  </a:lnTo>
+                  <a:lnTo>
+                    <a:pt x="2335307" y="340635"/>
+                  </a:lnTo>
+                  <a:lnTo>
+                    <a:pt x="2428720" y="340635"/>
+                  </a:lnTo>
+                  <a:lnTo>
+                    <a:pt x="2428720" y="244185"/>
+                  </a:lnTo>
+                  <a:lnTo>
+                    <a:pt x="2895781" y="244185"/>
+                  </a:lnTo>
+                  <a:lnTo>
+                    <a:pt x="2895781" y="195310"/>
+                  </a:lnTo>
+                  <a:lnTo>
+                    <a:pt x="3176018" y="195310"/>
+                  </a:lnTo>
+                  <a:lnTo>
+                    <a:pt x="3176018" y="146656"/>
+                  </a:lnTo>
+                  <a:lnTo>
+                    <a:pt x="3456255" y="146656"/>
+                  </a:lnTo>
+                  <a:lnTo>
+                    <a:pt x="3456255" y="98054"/>
+                  </a:lnTo>
+                  <a:lnTo>
+                    <a:pt x="4016729" y="98054"/>
+                  </a:lnTo>
+                  <a:lnTo>
+                    <a:pt x="4016729" y="49475"/>
+                  </a:lnTo>
+                  <a:lnTo>
+                    <a:pt x="7005923" y="49475"/>
+                  </a:lnTo>
+                  <a:lnTo>
+                    <a:pt x="7005923" y="0"/>
                   </a:lnTo>
                 </a:path>
               </a:pathLst>
             </a:custGeom>
-            <a:ln w="13550" cap="flat">
+            <a:ln w="27101" cap="flat">
               <a:solidFill>
-                <a:srgbClr val="EBEBEB">
+                <a:srgbClr val="1F78B4">
                   <a:alpha val="100000"/>
                 </a:srgbClr>
               </a:solidFill>
@@ -3002,205 +3074,90 @@
           </p:nvSpPr>
           <p:spPr>
             <a:xfrm>
-              <a:off x="1260991" y="4762148"/>
-              <a:ext cx="7005923" cy="746789"/>
+              <a:off x="1260991" y="2861938"/>
+              <a:ext cx="7005923" cy="2450994"/>
             </a:xfrm>
             <a:custGeom>
               <a:avLst/>
               <a:pathLst>
-                <a:path w="7005923" h="746789">
+                <a:path w="7005923" h="2450994">
                   <a:moveTo>
-                    <a:pt x="0" y="746789"/>
+                    <a:pt x="0" y="2450994"/>
                   </a:moveTo>
                   <a:lnTo>
-                    <a:pt x="280236" y="746789"/>
-                  </a:lnTo>
-                  <a:lnTo>
-                    <a:pt x="280236" y="709963"/>
-                  </a:lnTo>
-                  <a:lnTo>
-                    <a:pt x="373649" y="709963"/>
-                  </a:lnTo>
-                  <a:lnTo>
-                    <a:pt x="373649" y="600247"/>
-                  </a:lnTo>
-                  <a:lnTo>
-                    <a:pt x="560473" y="600247"/>
-                  </a:lnTo>
-                  <a:lnTo>
-                    <a:pt x="560473" y="525463"/>
-                  </a:lnTo>
-                  <a:lnTo>
-                    <a:pt x="840710" y="525463"/>
-                  </a:lnTo>
-                  <a:lnTo>
-                    <a:pt x="840710" y="487637"/>
-                  </a:lnTo>
-                  <a:lnTo>
-                    <a:pt x="934123" y="487637"/>
-                  </a:lnTo>
-                  <a:lnTo>
-                    <a:pt x="934123" y="410430"/>
-                  </a:lnTo>
-                  <a:lnTo>
-                    <a:pt x="1494596" y="410430"/>
-                  </a:lnTo>
-                  <a:lnTo>
-                    <a:pt x="1494596" y="331700"/>
-                  </a:lnTo>
-                  <a:lnTo>
-                    <a:pt x="2335307" y="331700"/>
-                  </a:lnTo>
-                  <a:lnTo>
-                    <a:pt x="2335307" y="291488"/>
-                  </a:lnTo>
-                  <a:lnTo>
-                    <a:pt x="2428720" y="291488"/>
-                  </a:lnTo>
-                  <a:lnTo>
-                    <a:pt x="2428720" y="209687"/>
-                  </a:lnTo>
-                  <a:lnTo>
-                    <a:pt x="2895781" y="209687"/>
-                  </a:lnTo>
-                  <a:lnTo>
-                    <a:pt x="2895781" y="167846"/>
-                  </a:lnTo>
-                  <a:lnTo>
-                    <a:pt x="3176018" y="167846"/>
-                  </a:lnTo>
-                  <a:lnTo>
-                    <a:pt x="3176018" y="126062"/>
-                  </a:lnTo>
-                  <a:lnTo>
-                    <a:pt x="3456255" y="126062"/>
-                  </a:lnTo>
-                  <a:lnTo>
-                    <a:pt x="3456255" y="84317"/>
-                  </a:lnTo>
-                  <a:lnTo>
-                    <a:pt x="4016729" y="84317"/>
-                  </a:lnTo>
-                  <a:lnTo>
-                    <a:pt x="4016729" y="42529"/>
-                  </a:lnTo>
-                  <a:lnTo>
-                    <a:pt x="7005923" y="42529"/>
-                  </a:lnTo>
-                  <a:lnTo>
-                    <a:pt x="7005923" y="0"/>
-                  </a:lnTo>
-                </a:path>
-              </a:pathLst>
-            </a:custGeom>
-            <a:ln w="27101" cap="flat">
-              <a:solidFill>
-                <a:srgbClr val="1F78B4">
-                  <a:alpha val="100000"/>
-                </a:srgbClr>
-              </a:solidFill>
-              <a:prstDash val="solid"/>
-              <a:round/>
-            </a:ln>
-          </p:spPr>
-          <p:txBody>
-            <a:bodyPr/>
-            <a:lstStyle/>
-            <a:p/>
-          </p:txBody>
-        </p:sp>
-        <p:sp>
-          <p:nvSpPr>
-            <p:cNvPr id="22" name="pl22"/>
-            <p:cNvSpPr/>
-            <p:nvPr/>
-          </p:nvSpPr>
-          <p:spPr>
-            <a:xfrm>
-              <a:off x="1260991" y="2861938"/>
-              <a:ext cx="7005923" cy="2445346"/>
-            </a:xfrm>
-            <a:custGeom>
-              <a:avLst/>
-              <a:pathLst>
-                <a:path w="7005923" h="2445346">
-                  <a:moveTo>
-                    <a:pt x="0" y="2445346"/>
-                  </a:moveTo>
-                  <a:lnTo>
-                    <a:pt x="280236" y="2445346"/>
-                  </a:lnTo>
-                  <a:lnTo>
-                    <a:pt x="280236" y="2307496"/>
-                  </a:lnTo>
-                  <a:lnTo>
-                    <a:pt x="373649" y="2307496"/>
-                  </a:lnTo>
-                  <a:lnTo>
-                    <a:pt x="373649" y="1908069"/>
-                  </a:lnTo>
-                  <a:lnTo>
-                    <a:pt x="560473" y="1908069"/>
-                  </a:lnTo>
-                  <a:lnTo>
-                    <a:pt x="560473" y="1645273"/>
-                  </a:lnTo>
-                  <a:lnTo>
-                    <a:pt x="840710" y="1645273"/>
-                  </a:lnTo>
-                  <a:lnTo>
-                    <a:pt x="840710" y="1515206"/>
-                  </a:lnTo>
-                  <a:lnTo>
-                    <a:pt x="934123" y="1515206"/>
-                  </a:lnTo>
-                  <a:lnTo>
-                    <a:pt x="934123" y="1255563"/>
-                  </a:lnTo>
-                  <a:lnTo>
-                    <a:pt x="1494596" y="1255563"/>
-                  </a:lnTo>
-                  <a:lnTo>
-                    <a:pt x="1494596" y="998710"/>
-                  </a:lnTo>
-                  <a:lnTo>
-                    <a:pt x="2335307" y="998710"/>
-                  </a:lnTo>
-                  <a:lnTo>
-                    <a:pt x="2335307" y="870539"/>
-                  </a:lnTo>
-                  <a:lnTo>
-                    <a:pt x="2428720" y="870539"/>
-                  </a:lnTo>
-                  <a:lnTo>
-                    <a:pt x="2428720" y="615989"/>
-                  </a:lnTo>
-                  <a:lnTo>
-                    <a:pt x="2895781" y="615989"/>
-                  </a:lnTo>
-                  <a:lnTo>
-                    <a:pt x="2895781" y="488930"/>
-                  </a:lnTo>
-                  <a:lnTo>
-                    <a:pt x="3176018" y="488930"/>
-                  </a:lnTo>
-                  <a:lnTo>
-                    <a:pt x="3176018" y="364135"/>
-                  </a:lnTo>
-                  <a:lnTo>
-                    <a:pt x="3456255" y="364135"/>
-                  </a:lnTo>
-                  <a:lnTo>
-                    <a:pt x="3456255" y="241514"/>
-                  </a:lnTo>
-                  <a:lnTo>
-                    <a:pt x="4016729" y="241514"/>
-                  </a:lnTo>
-                  <a:lnTo>
-                    <a:pt x="4016729" y="120798"/>
-                  </a:lnTo>
-                  <a:lnTo>
-                    <a:pt x="7005923" y="120798"/>
+                    <a:pt x="280236" y="2450994"/>
+                  </a:lnTo>
+                  <a:lnTo>
+                    <a:pt x="280236" y="2315053"/>
+                  </a:lnTo>
+                  <a:lnTo>
+                    <a:pt x="373649" y="2315053"/>
+                  </a:lnTo>
+                  <a:lnTo>
+                    <a:pt x="373649" y="1921823"/>
+                  </a:lnTo>
+                  <a:lnTo>
+                    <a:pt x="560473" y="1921823"/>
+                  </a:lnTo>
+                  <a:lnTo>
+                    <a:pt x="560473" y="1658118"/>
+                  </a:lnTo>
+                  <a:lnTo>
+                    <a:pt x="840710" y="1658118"/>
+                  </a:lnTo>
+                  <a:lnTo>
+                    <a:pt x="840710" y="1527906"/>
+                  </a:lnTo>
+                  <a:lnTo>
+                    <a:pt x="934123" y="1527906"/>
+                  </a:lnTo>
+                  <a:lnTo>
+                    <a:pt x="934123" y="1267444"/>
+                  </a:lnTo>
+                  <a:lnTo>
+                    <a:pt x="1494596" y="1267444"/>
+                  </a:lnTo>
+                  <a:lnTo>
+                    <a:pt x="1494596" y="1007993"/>
+                  </a:lnTo>
+                  <a:lnTo>
+                    <a:pt x="2335307" y="1007993"/>
+                  </a:lnTo>
+                  <a:lnTo>
+                    <a:pt x="2335307" y="878956"/>
+                  </a:lnTo>
+                  <a:lnTo>
+                    <a:pt x="2428720" y="878956"/>
+                  </a:lnTo>
+                  <a:lnTo>
+                    <a:pt x="2428720" y="620636"/>
+                  </a:lnTo>
+                  <a:lnTo>
+                    <a:pt x="2895781" y="620636"/>
+                  </a:lnTo>
+                  <a:lnTo>
+                    <a:pt x="2895781" y="492646"/>
+                  </a:lnTo>
+                  <a:lnTo>
+                    <a:pt x="3176018" y="492646"/>
+                  </a:lnTo>
+                  <a:lnTo>
+                    <a:pt x="3176018" y="367136"/>
+                  </a:lnTo>
+                  <a:lnTo>
+                    <a:pt x="3456255" y="367136"/>
+                  </a:lnTo>
+                  <a:lnTo>
+                    <a:pt x="3456255" y="243625"/>
+                  </a:lnTo>
+                  <a:lnTo>
+                    <a:pt x="4016729" y="243625"/>
+                  </a:lnTo>
+                  <a:lnTo>
+                    <a:pt x="4016729" y="122006"/>
+                  </a:lnTo>
+                  <a:lnTo>
+                    <a:pt x="7005923" y="122006"/>
                   </a:lnTo>
                   <a:lnTo>
                     <a:pt x="7005923" y="0"/>
@@ -3226,7 +3183,7 @@
         </p:sp>
         <p:sp>
           <p:nvSpPr>
-            <p:cNvPr id="23" name="tx23"/>
+            <p:cNvPr id="22" name="tx22"/>
             <p:cNvSpPr/>
             <p:nvPr/>
           </p:nvSpPr>
@@ -3272,13 +3229,13 @@
         </p:sp>
         <p:sp>
           <p:nvSpPr>
-            <p:cNvPr id="24" name="tx24"/>
+            <p:cNvPr id="23" name="tx23"/>
             <p:cNvSpPr/>
             <p:nvPr/>
           </p:nvSpPr>
           <p:spPr>
             <a:xfrm>
-              <a:off x="692708" y="4702148"/>
+              <a:off x="692708" y="4617685"/>
               <a:ext cx="155356" cy="80101"/>
             </a:xfrm>
             <a:prstGeom prst="rect">
@@ -3318,13 +3275,13 @@
         </p:sp>
         <p:sp>
           <p:nvSpPr>
-            <p:cNvPr id="25" name="tx25"/>
+            <p:cNvPr id="24" name="tx24"/>
             <p:cNvSpPr/>
             <p:nvPr/>
           </p:nvSpPr>
           <p:spPr>
             <a:xfrm>
-              <a:off x="692708" y="3863925"/>
+              <a:off x="692708" y="3694998"/>
               <a:ext cx="155356" cy="80101"/>
             </a:xfrm>
             <a:prstGeom prst="rect">
@@ -3364,13 +3321,13 @@
         </p:sp>
         <p:sp>
           <p:nvSpPr>
-            <p:cNvPr id="26" name="tx26"/>
+            <p:cNvPr id="25" name="tx25"/>
             <p:cNvSpPr/>
             <p:nvPr/>
           </p:nvSpPr>
           <p:spPr>
             <a:xfrm>
-              <a:off x="692708" y="3025702"/>
+              <a:off x="692708" y="2772312"/>
               <a:ext cx="155356" cy="80101"/>
             </a:xfrm>
             <a:prstGeom prst="rect">
@@ -3410,7 +3367,7 @@
         </p:sp>
         <p:sp>
           <p:nvSpPr>
-            <p:cNvPr id="27" name="tx27"/>
+            <p:cNvPr id="26" name="tx26"/>
             <p:cNvSpPr/>
             <p:nvPr/>
           </p:nvSpPr>
@@ -3456,7 +3413,7 @@
         </p:sp>
         <p:sp>
           <p:nvSpPr>
-            <p:cNvPr id="28" name="tx28"/>
+            <p:cNvPr id="27" name="tx27"/>
             <p:cNvSpPr/>
             <p:nvPr/>
           </p:nvSpPr>
@@ -3502,7 +3459,7 @@
         </p:sp>
         <p:sp>
           <p:nvSpPr>
-            <p:cNvPr id="29" name="tx29"/>
+            <p:cNvPr id="28" name="tx28"/>
             <p:cNvSpPr/>
             <p:nvPr/>
           </p:nvSpPr>
@@ -3548,7 +3505,7 @@
         </p:sp>
         <p:sp>
           <p:nvSpPr>
-            <p:cNvPr id="30" name="tx30"/>
+            <p:cNvPr id="29" name="tx29"/>
             <p:cNvSpPr/>
             <p:nvPr/>
           </p:nvSpPr>
@@ -3594,7 +3551,7 @@
         </p:sp>
         <p:sp>
           <p:nvSpPr>
-            <p:cNvPr id="31" name="tx31"/>
+            <p:cNvPr id="30" name="tx30"/>
             <p:cNvSpPr/>
             <p:nvPr/>
           </p:nvSpPr>
@@ -3640,7 +3597,7 @@
         </p:sp>
         <p:sp>
           <p:nvSpPr>
-            <p:cNvPr id="32" name="tx32"/>
+            <p:cNvPr id="31" name="tx31"/>
             <p:cNvSpPr/>
             <p:nvPr/>
           </p:nvSpPr>
@@ -3686,7 +3643,7 @@
         </p:sp>
         <p:sp>
           <p:nvSpPr>
-            <p:cNvPr id="33" name="tx33"/>
+            <p:cNvPr id="32" name="tx32"/>
             <p:cNvSpPr/>
             <p:nvPr/>
           </p:nvSpPr>
@@ -3732,7 +3689,7 @@
         </p:sp>
         <p:sp>
           <p:nvSpPr>
-            <p:cNvPr id="34" name="pl34"/>
+            <p:cNvPr id="33" name="pl33"/>
             <p:cNvSpPr/>
             <p:nvPr/>
           </p:nvSpPr>
@@ -3772,7 +3729,7 @@
         </p:sp>
         <p:sp>
           <p:nvSpPr>
-            <p:cNvPr id="35" name="pl35"/>
+            <p:cNvPr id="34" name="pl34"/>
             <p:cNvSpPr/>
             <p:nvPr/>
           </p:nvSpPr>
@@ -3812,7 +3769,7 @@
         </p:sp>
         <p:sp>
           <p:nvSpPr>
-            <p:cNvPr id="36" name="tx36"/>
+            <p:cNvPr id="35" name="tx35"/>
             <p:cNvSpPr/>
             <p:nvPr/>
           </p:nvSpPr>
@@ -3858,7 +3815,7 @@
         </p:sp>
         <p:sp>
           <p:nvSpPr>
-            <p:cNvPr id="37" name="tx37"/>
+            <p:cNvPr id="36" name="tx36"/>
             <p:cNvSpPr/>
             <p:nvPr/>
           </p:nvSpPr>
@@ -3904,14 +3861,14 @@
         </p:sp>
         <p:sp>
           <p:nvSpPr>
-            <p:cNvPr id="38" name="tx38"/>
+            <p:cNvPr id="37" name="tx37"/>
             <p:cNvSpPr/>
             <p:nvPr/>
           </p:nvSpPr>
           <p:spPr>
             <a:xfrm>
               <a:off x="910695" y="1896563"/>
-              <a:ext cx="3984498" cy="91165"/>
+              <a:ext cx="3913906" cy="91165"/>
             </a:xfrm>
             <a:prstGeom prst="rect">
               <a:avLst/>
@@ -3943,14 +3900,14 @@
                   <a:latin typeface="Helvetica"/>
                   <a:cs typeface="Helvetica"/>
                 </a:rPr>
-                <a:t>Discrep &gt;= +25 vs &lt;+25: subHR = 3.87 (95% CI 1.43-10.51), p = 0.008</a:t>
+                <a:t>Discrep &gt;= +25 vs &lt;+25: subHR = 3.30 (95% CI 1.22-8.94), p = 0.019</a:t>
               </a:r>
             </a:p>
           </p:txBody>
         </p:sp>
         <p:sp>
           <p:nvSpPr>
-            <p:cNvPr id="39" name="tx39"/>
+            <p:cNvPr id="38" name="tx38"/>
             <p:cNvSpPr/>
             <p:nvPr/>
           </p:nvSpPr>

--- a/docs/plots/carbo/jx_carbo_adjcif_sideeffect.pptx
+++ b/docs/plots/carbo/jx_carbo_adjcif_sideeffect.pptx
@@ -2271,7 +2271,7 @@
           </p:nvSpPr>
           <p:spPr>
             <a:xfrm>
-              <a:off x="910695" y="5119079"/>
+              <a:off x="910695" y="5107558"/>
               <a:ext cx="7706515" cy="0"/>
             </a:xfrm>
             <a:custGeom>
@@ -2314,7 +2314,7 @@
           </p:nvSpPr>
           <p:spPr>
             <a:xfrm>
-              <a:off x="910695" y="4196392"/>
+              <a:off x="910695" y="4161832"/>
               <a:ext cx="7706515" cy="0"/>
             </a:xfrm>
             <a:custGeom>
@@ -2357,7 +2357,7 @@
           </p:nvSpPr>
           <p:spPr>
             <a:xfrm>
-              <a:off x="910695" y="3273706"/>
+              <a:off x="910695" y="3216105"/>
               <a:ext cx="7706515" cy="0"/>
             </a:xfrm>
             <a:custGeom>
@@ -2615,7 +2615,7 @@
           </p:nvSpPr>
           <p:spPr>
             <a:xfrm>
-              <a:off x="910695" y="4657735"/>
+              <a:off x="910695" y="4634695"/>
               <a:ext cx="7706515" cy="0"/>
             </a:xfrm>
             <a:custGeom>
@@ -2658,7 +2658,7 @@
           </p:nvSpPr>
           <p:spPr>
             <a:xfrm>
-              <a:off x="910695" y="3735049"/>
+              <a:off x="910695" y="3688968"/>
               <a:ext cx="7706515" cy="0"/>
             </a:xfrm>
             <a:custGeom>
@@ -2701,7 +2701,7 @@
           </p:nvSpPr>
           <p:spPr>
             <a:xfrm>
-              <a:off x="910695" y="2812362"/>
+              <a:off x="910695" y="2743241"/>
               <a:ext cx="7706515" cy="0"/>
             </a:xfrm>
             <a:custGeom>
@@ -2959,90 +2959,90 @@
           </p:nvSpPr>
           <p:spPr>
             <a:xfrm>
-              <a:off x="1260991" y="4626027"/>
-              <a:ext cx="7005923" cy="872223"/>
+              <a:off x="1260991" y="4591162"/>
+              <a:ext cx="7005923" cy="903004"/>
             </a:xfrm>
             <a:custGeom>
               <a:avLst/>
               <a:pathLst>
-                <a:path w="7005923" h="872223">
+                <a:path w="7005923" h="903004">
                   <a:moveTo>
-                    <a:pt x="0" y="872223"/>
+                    <a:pt x="0" y="903004"/>
                   </a:moveTo>
                   <a:lnTo>
-                    <a:pt x="280236" y="872223"/>
-                  </a:lnTo>
-                  <a:lnTo>
-                    <a:pt x="280236" y="829618"/>
-                  </a:lnTo>
-                  <a:lnTo>
-                    <a:pt x="373649" y="829618"/>
-                  </a:lnTo>
-                  <a:lnTo>
-                    <a:pt x="373649" y="703022"/>
-                  </a:lnTo>
-                  <a:lnTo>
-                    <a:pt x="560473" y="703022"/>
-                  </a:lnTo>
-                  <a:lnTo>
-                    <a:pt x="560473" y="615195"/>
-                  </a:lnTo>
-                  <a:lnTo>
-                    <a:pt x="840710" y="615195"/>
-                  </a:lnTo>
-                  <a:lnTo>
-                    <a:pt x="840710" y="570917"/>
-                  </a:lnTo>
-                  <a:lnTo>
-                    <a:pt x="934123" y="570917"/>
-                  </a:lnTo>
-                  <a:lnTo>
-                    <a:pt x="934123" y="480465"/>
-                  </a:lnTo>
-                  <a:lnTo>
-                    <a:pt x="1494596" y="480465"/>
-                  </a:lnTo>
-                  <a:lnTo>
-                    <a:pt x="1494596" y="387757"/>
-                  </a:lnTo>
-                  <a:lnTo>
-                    <a:pt x="2335307" y="387757"/>
-                  </a:lnTo>
-                  <a:lnTo>
-                    <a:pt x="2335307" y="340635"/>
-                  </a:lnTo>
-                  <a:lnTo>
-                    <a:pt x="2428720" y="340635"/>
-                  </a:lnTo>
-                  <a:lnTo>
-                    <a:pt x="2428720" y="244185"/>
-                  </a:lnTo>
-                  <a:lnTo>
-                    <a:pt x="2895781" y="244185"/>
-                  </a:lnTo>
-                  <a:lnTo>
-                    <a:pt x="2895781" y="195310"/>
-                  </a:lnTo>
-                  <a:lnTo>
-                    <a:pt x="3176018" y="195310"/>
-                  </a:lnTo>
-                  <a:lnTo>
-                    <a:pt x="3176018" y="146656"/>
-                  </a:lnTo>
-                  <a:lnTo>
-                    <a:pt x="3456255" y="146656"/>
-                  </a:lnTo>
-                  <a:lnTo>
-                    <a:pt x="3456255" y="98054"/>
-                  </a:lnTo>
-                  <a:lnTo>
-                    <a:pt x="4016729" y="98054"/>
-                  </a:lnTo>
-                  <a:lnTo>
-                    <a:pt x="4016729" y="49475"/>
-                  </a:lnTo>
-                  <a:lnTo>
-                    <a:pt x="7005923" y="49475"/>
+                    <a:pt x="280236" y="903004"/>
+                  </a:lnTo>
+                  <a:lnTo>
+                    <a:pt x="280236" y="858717"/>
+                  </a:lnTo>
+                  <a:lnTo>
+                    <a:pt x="373649" y="858717"/>
+                  </a:lnTo>
+                  <a:lnTo>
+                    <a:pt x="373649" y="726900"/>
+                  </a:lnTo>
+                  <a:lnTo>
+                    <a:pt x="560473" y="726900"/>
+                  </a:lnTo>
+                  <a:lnTo>
+                    <a:pt x="560473" y="637145"/>
+                  </a:lnTo>
+                  <a:lnTo>
+                    <a:pt x="840710" y="637145"/>
+                  </a:lnTo>
+                  <a:lnTo>
+                    <a:pt x="840710" y="591723"/>
+                  </a:lnTo>
+                  <a:lnTo>
+                    <a:pt x="934123" y="591723"/>
+                  </a:lnTo>
+                  <a:lnTo>
+                    <a:pt x="934123" y="498860"/>
+                  </a:lnTo>
+                  <a:lnTo>
+                    <a:pt x="1494596" y="498860"/>
+                  </a:lnTo>
+                  <a:lnTo>
+                    <a:pt x="1494596" y="403451"/>
+                  </a:lnTo>
+                  <a:lnTo>
+                    <a:pt x="2335307" y="403451"/>
+                  </a:lnTo>
+                  <a:lnTo>
+                    <a:pt x="2335307" y="354472"/>
+                  </a:lnTo>
+                  <a:lnTo>
+                    <a:pt x="2428720" y="354472"/>
+                  </a:lnTo>
+                  <a:lnTo>
+                    <a:pt x="2428720" y="254852"/>
+                  </a:lnTo>
+                  <a:lnTo>
+                    <a:pt x="2895781" y="254852"/>
+                  </a:lnTo>
+                  <a:lnTo>
+                    <a:pt x="2895781" y="203839"/>
+                  </a:lnTo>
+                  <a:lnTo>
+                    <a:pt x="3176018" y="203839"/>
+                  </a:lnTo>
+                  <a:lnTo>
+                    <a:pt x="3176018" y="153148"/>
+                  </a:lnTo>
+                  <a:lnTo>
+                    <a:pt x="3456255" y="153148"/>
+                  </a:lnTo>
+                  <a:lnTo>
+                    <a:pt x="3456255" y="102499"/>
+                  </a:lnTo>
+                  <a:lnTo>
+                    <a:pt x="4016729" y="102499"/>
+                  </a:lnTo>
+                  <a:lnTo>
+                    <a:pt x="4016729" y="51744"/>
+                  </a:lnTo>
+                  <a:lnTo>
+                    <a:pt x="7005923" y="51744"/>
                   </a:lnTo>
                   <a:lnTo>
                     <a:pt x="7005923" y="0"/>
@@ -3075,89 +3075,89 @@
           <p:spPr>
             <a:xfrm>
               <a:off x="1260991" y="2861938"/>
-              <a:ext cx="7005923" cy="2450994"/>
+              <a:ext cx="7005923" cy="2447837"/>
             </a:xfrm>
             <a:custGeom>
               <a:avLst/>
               <a:pathLst>
-                <a:path w="7005923" h="2450994">
+                <a:path w="7005923" h="2447837">
                   <a:moveTo>
-                    <a:pt x="0" y="2450994"/>
+                    <a:pt x="0" y="2447837"/>
                   </a:moveTo>
                   <a:lnTo>
-                    <a:pt x="280236" y="2450994"/>
-                  </a:lnTo>
-                  <a:lnTo>
-                    <a:pt x="280236" y="2315053"/>
-                  </a:lnTo>
-                  <a:lnTo>
-                    <a:pt x="373649" y="2315053"/>
-                  </a:lnTo>
-                  <a:lnTo>
-                    <a:pt x="373649" y="1921823"/>
-                  </a:lnTo>
-                  <a:lnTo>
-                    <a:pt x="560473" y="1921823"/>
-                  </a:lnTo>
-                  <a:lnTo>
-                    <a:pt x="560473" y="1658118"/>
-                  </a:lnTo>
-                  <a:lnTo>
-                    <a:pt x="840710" y="1658118"/>
-                  </a:lnTo>
-                  <a:lnTo>
-                    <a:pt x="840710" y="1527906"/>
-                  </a:lnTo>
-                  <a:lnTo>
-                    <a:pt x="934123" y="1527906"/>
-                  </a:lnTo>
-                  <a:lnTo>
-                    <a:pt x="934123" y="1267444"/>
-                  </a:lnTo>
-                  <a:lnTo>
-                    <a:pt x="1494596" y="1267444"/>
-                  </a:lnTo>
-                  <a:lnTo>
-                    <a:pt x="1494596" y="1007993"/>
-                  </a:lnTo>
-                  <a:lnTo>
-                    <a:pt x="2335307" y="1007993"/>
-                  </a:lnTo>
-                  <a:lnTo>
-                    <a:pt x="2335307" y="878956"/>
-                  </a:lnTo>
-                  <a:lnTo>
-                    <a:pt x="2428720" y="878956"/>
-                  </a:lnTo>
-                  <a:lnTo>
-                    <a:pt x="2428720" y="620636"/>
-                  </a:lnTo>
-                  <a:lnTo>
-                    <a:pt x="2895781" y="620636"/>
-                  </a:lnTo>
-                  <a:lnTo>
-                    <a:pt x="2895781" y="492646"/>
-                  </a:lnTo>
-                  <a:lnTo>
-                    <a:pt x="3176018" y="492646"/>
-                  </a:lnTo>
-                  <a:lnTo>
-                    <a:pt x="3176018" y="367136"/>
-                  </a:lnTo>
-                  <a:lnTo>
-                    <a:pt x="3456255" y="367136"/>
-                  </a:lnTo>
-                  <a:lnTo>
-                    <a:pt x="3456255" y="243625"/>
-                  </a:lnTo>
-                  <a:lnTo>
-                    <a:pt x="4016729" y="243625"/>
-                  </a:lnTo>
-                  <a:lnTo>
-                    <a:pt x="4016729" y="122006"/>
-                  </a:lnTo>
-                  <a:lnTo>
-                    <a:pt x="7005923" y="122006"/>
+                    <a:pt x="280236" y="2447837"/>
+                  </a:lnTo>
+                  <a:lnTo>
+                    <a:pt x="280236" y="2311540"/>
+                  </a:lnTo>
+                  <a:lnTo>
+                    <a:pt x="373649" y="2311540"/>
+                  </a:lnTo>
+                  <a:lnTo>
+                    <a:pt x="373649" y="1916334"/>
+                  </a:lnTo>
+                  <a:lnTo>
+                    <a:pt x="560473" y="1916334"/>
+                  </a:lnTo>
+                  <a:lnTo>
+                    <a:pt x="560473" y="1656037"/>
+                  </a:lnTo>
+                  <a:lnTo>
+                    <a:pt x="840710" y="1656037"/>
+                  </a:lnTo>
+                  <a:lnTo>
+                    <a:pt x="840710" y="1526968"/>
+                  </a:lnTo>
+                  <a:lnTo>
+                    <a:pt x="934123" y="1526968"/>
+                  </a:lnTo>
+                  <a:lnTo>
+                    <a:pt x="934123" y="1268567"/>
+                  </a:lnTo>
+                  <a:lnTo>
+                    <a:pt x="1494596" y="1268567"/>
+                  </a:lnTo>
+                  <a:lnTo>
+                    <a:pt x="1494596" y="1010590"/>
+                  </a:lnTo>
+                  <a:lnTo>
+                    <a:pt x="2335307" y="1010590"/>
+                  </a:lnTo>
+                  <a:lnTo>
+                    <a:pt x="2335307" y="881056"/>
+                  </a:lnTo>
+                  <a:lnTo>
+                    <a:pt x="2428720" y="881056"/>
+                  </a:lnTo>
+                  <a:lnTo>
+                    <a:pt x="2428720" y="623554"/>
+                  </a:lnTo>
+                  <a:lnTo>
+                    <a:pt x="2895781" y="623554"/>
+                  </a:lnTo>
+                  <a:lnTo>
+                    <a:pt x="2895781" y="494738"/>
+                  </a:lnTo>
+                  <a:lnTo>
+                    <a:pt x="3176018" y="494738"/>
+                  </a:lnTo>
+                  <a:lnTo>
+                    <a:pt x="3176018" y="368744"/>
+                  </a:lnTo>
+                  <a:lnTo>
+                    <a:pt x="3456255" y="368744"/>
+                  </a:lnTo>
+                  <a:lnTo>
+                    <a:pt x="3456255" y="244828"/>
+                  </a:lnTo>
+                  <a:lnTo>
+                    <a:pt x="4016729" y="244828"/>
+                  </a:lnTo>
+                  <a:lnTo>
+                    <a:pt x="4016729" y="122610"/>
+                  </a:lnTo>
+                  <a:lnTo>
+                    <a:pt x="7005923" y="122610"/>
                   </a:lnTo>
                   <a:lnTo>
                     <a:pt x="7005923" y="0"/>
@@ -3235,7 +3235,7 @@
           </p:nvSpPr>
           <p:spPr>
             <a:xfrm>
-              <a:off x="692708" y="4617685"/>
+              <a:off x="692708" y="4594644"/>
               <a:ext cx="155356" cy="80101"/>
             </a:xfrm>
             <a:prstGeom prst="rect">
@@ -3281,7 +3281,7 @@
           </p:nvSpPr>
           <p:spPr>
             <a:xfrm>
-              <a:off x="692708" y="3694998"/>
+              <a:off x="692708" y="3648917"/>
               <a:ext cx="155356" cy="80101"/>
             </a:xfrm>
             <a:prstGeom prst="rect">
@@ -3327,7 +3327,7 @@
           </p:nvSpPr>
           <p:spPr>
             <a:xfrm>
-              <a:off x="692708" y="2772312"/>
+              <a:off x="692708" y="2703191"/>
               <a:ext cx="155356" cy="80101"/>
             </a:xfrm>
             <a:prstGeom prst="rect">
@@ -3900,7 +3900,7 @@
                   <a:latin typeface="Helvetica"/>
                   <a:cs typeface="Helvetica"/>
                 </a:rPr>
-                <a:t>Discrep &gt;= +25 vs &lt;+25: subHR = 3.30 (95% CI 1.22-8.94), p = 0.019</a:t>
+                <a:t>Discrep &gt;= +25 vs &lt;+25: subHR = 3.18 (95% CI 1.20-8.40), p = 0.020</a:t>
               </a:r>
             </a:p>
           </p:txBody>

--- a/docs/plots/carbo/jx_carbo_adjcif_sideeffect.pptx
+++ b/docs/plots/carbo/jx_carbo_adjcif_sideeffect.pptx
@@ -2271,7 +2271,7 @@
           </p:nvSpPr>
           <p:spPr>
             <a:xfrm>
-              <a:off x="910695" y="5107558"/>
+              <a:off x="910695" y="5119079"/>
               <a:ext cx="7706515" cy="0"/>
             </a:xfrm>
             <a:custGeom>
@@ -2314,7 +2314,7 @@
           </p:nvSpPr>
           <p:spPr>
             <a:xfrm>
-              <a:off x="910695" y="4161832"/>
+              <a:off x="910695" y="4196392"/>
               <a:ext cx="7706515" cy="0"/>
             </a:xfrm>
             <a:custGeom>
@@ -2357,7 +2357,7 @@
           </p:nvSpPr>
           <p:spPr>
             <a:xfrm>
-              <a:off x="910695" y="3216105"/>
+              <a:off x="910695" y="3273706"/>
               <a:ext cx="7706515" cy="0"/>
             </a:xfrm>
             <a:custGeom>
@@ -2615,7 +2615,7 @@
           </p:nvSpPr>
           <p:spPr>
             <a:xfrm>
-              <a:off x="910695" y="4634695"/>
+              <a:off x="910695" y="4657735"/>
               <a:ext cx="7706515" cy="0"/>
             </a:xfrm>
             <a:custGeom>
@@ -2658,7 +2658,7 @@
           </p:nvSpPr>
           <p:spPr>
             <a:xfrm>
-              <a:off x="910695" y="3688968"/>
+              <a:off x="910695" y="3735049"/>
               <a:ext cx="7706515" cy="0"/>
             </a:xfrm>
             <a:custGeom>
@@ -2701,7 +2701,7 @@
           </p:nvSpPr>
           <p:spPr>
             <a:xfrm>
-              <a:off x="910695" y="2743241"/>
+              <a:off x="910695" y="2812362"/>
               <a:ext cx="7706515" cy="0"/>
             </a:xfrm>
             <a:custGeom>
@@ -2959,90 +2959,90 @@
           </p:nvSpPr>
           <p:spPr>
             <a:xfrm>
-              <a:off x="1260991" y="4591162"/>
-              <a:ext cx="7005923" cy="903004"/>
+              <a:off x="1260991" y="4626027"/>
+              <a:ext cx="7005923" cy="872223"/>
             </a:xfrm>
             <a:custGeom>
               <a:avLst/>
               <a:pathLst>
-                <a:path w="7005923" h="903004">
+                <a:path w="7005923" h="872223">
                   <a:moveTo>
-                    <a:pt x="0" y="903004"/>
+                    <a:pt x="0" y="872223"/>
                   </a:moveTo>
                   <a:lnTo>
-                    <a:pt x="280236" y="903004"/>
-                  </a:lnTo>
-                  <a:lnTo>
-                    <a:pt x="280236" y="858717"/>
-                  </a:lnTo>
-                  <a:lnTo>
-                    <a:pt x="373649" y="858717"/>
-                  </a:lnTo>
-                  <a:lnTo>
-                    <a:pt x="373649" y="726900"/>
-                  </a:lnTo>
-                  <a:lnTo>
-                    <a:pt x="560473" y="726900"/>
-                  </a:lnTo>
-                  <a:lnTo>
-                    <a:pt x="560473" y="637145"/>
-                  </a:lnTo>
-                  <a:lnTo>
-                    <a:pt x="840710" y="637145"/>
-                  </a:lnTo>
-                  <a:lnTo>
-                    <a:pt x="840710" y="591723"/>
-                  </a:lnTo>
-                  <a:lnTo>
-                    <a:pt x="934123" y="591723"/>
-                  </a:lnTo>
-                  <a:lnTo>
-                    <a:pt x="934123" y="498860"/>
-                  </a:lnTo>
-                  <a:lnTo>
-                    <a:pt x="1494596" y="498860"/>
-                  </a:lnTo>
-                  <a:lnTo>
-                    <a:pt x="1494596" y="403451"/>
-                  </a:lnTo>
-                  <a:lnTo>
-                    <a:pt x="2335307" y="403451"/>
-                  </a:lnTo>
-                  <a:lnTo>
-                    <a:pt x="2335307" y="354472"/>
-                  </a:lnTo>
-                  <a:lnTo>
-                    <a:pt x="2428720" y="354472"/>
-                  </a:lnTo>
-                  <a:lnTo>
-                    <a:pt x="2428720" y="254852"/>
-                  </a:lnTo>
-                  <a:lnTo>
-                    <a:pt x="2895781" y="254852"/>
-                  </a:lnTo>
-                  <a:lnTo>
-                    <a:pt x="2895781" y="203839"/>
-                  </a:lnTo>
-                  <a:lnTo>
-                    <a:pt x="3176018" y="203839"/>
-                  </a:lnTo>
-                  <a:lnTo>
-                    <a:pt x="3176018" y="153148"/>
-                  </a:lnTo>
-                  <a:lnTo>
-                    <a:pt x="3456255" y="153148"/>
-                  </a:lnTo>
-                  <a:lnTo>
-                    <a:pt x="3456255" y="102499"/>
-                  </a:lnTo>
-                  <a:lnTo>
-                    <a:pt x="4016729" y="102499"/>
-                  </a:lnTo>
-                  <a:lnTo>
-                    <a:pt x="4016729" y="51744"/>
-                  </a:lnTo>
-                  <a:lnTo>
-                    <a:pt x="7005923" y="51744"/>
+                    <a:pt x="280236" y="872223"/>
+                  </a:lnTo>
+                  <a:lnTo>
+                    <a:pt x="280236" y="829618"/>
+                  </a:lnTo>
+                  <a:lnTo>
+                    <a:pt x="373649" y="829618"/>
+                  </a:lnTo>
+                  <a:lnTo>
+                    <a:pt x="373649" y="703022"/>
+                  </a:lnTo>
+                  <a:lnTo>
+                    <a:pt x="560473" y="703022"/>
+                  </a:lnTo>
+                  <a:lnTo>
+                    <a:pt x="560473" y="615195"/>
+                  </a:lnTo>
+                  <a:lnTo>
+                    <a:pt x="840710" y="615195"/>
+                  </a:lnTo>
+                  <a:lnTo>
+                    <a:pt x="840710" y="570917"/>
+                  </a:lnTo>
+                  <a:lnTo>
+                    <a:pt x="934123" y="570917"/>
+                  </a:lnTo>
+                  <a:lnTo>
+                    <a:pt x="934123" y="480465"/>
+                  </a:lnTo>
+                  <a:lnTo>
+                    <a:pt x="1494596" y="480465"/>
+                  </a:lnTo>
+                  <a:lnTo>
+                    <a:pt x="1494596" y="387757"/>
+                  </a:lnTo>
+                  <a:lnTo>
+                    <a:pt x="2335307" y="387757"/>
+                  </a:lnTo>
+                  <a:lnTo>
+                    <a:pt x="2335307" y="340635"/>
+                  </a:lnTo>
+                  <a:lnTo>
+                    <a:pt x="2428720" y="340635"/>
+                  </a:lnTo>
+                  <a:lnTo>
+                    <a:pt x="2428720" y="244185"/>
+                  </a:lnTo>
+                  <a:lnTo>
+                    <a:pt x="2895781" y="244185"/>
+                  </a:lnTo>
+                  <a:lnTo>
+                    <a:pt x="2895781" y="195310"/>
+                  </a:lnTo>
+                  <a:lnTo>
+                    <a:pt x="3176018" y="195310"/>
+                  </a:lnTo>
+                  <a:lnTo>
+                    <a:pt x="3176018" y="146656"/>
+                  </a:lnTo>
+                  <a:lnTo>
+                    <a:pt x="3456255" y="146656"/>
+                  </a:lnTo>
+                  <a:lnTo>
+                    <a:pt x="3456255" y="98054"/>
+                  </a:lnTo>
+                  <a:lnTo>
+                    <a:pt x="4016729" y="98054"/>
+                  </a:lnTo>
+                  <a:lnTo>
+                    <a:pt x="4016729" y="49475"/>
+                  </a:lnTo>
+                  <a:lnTo>
+                    <a:pt x="7005923" y="49475"/>
                   </a:lnTo>
                   <a:lnTo>
                     <a:pt x="7005923" y="0"/>
@@ -3075,89 +3075,89 @@
           <p:spPr>
             <a:xfrm>
               <a:off x="1260991" y="2861938"/>
-              <a:ext cx="7005923" cy="2447837"/>
+              <a:ext cx="7005923" cy="2450994"/>
             </a:xfrm>
             <a:custGeom>
               <a:avLst/>
               <a:pathLst>
-                <a:path w="7005923" h="2447837">
+                <a:path w="7005923" h="2450994">
                   <a:moveTo>
-                    <a:pt x="0" y="2447837"/>
+                    <a:pt x="0" y="2450994"/>
                   </a:moveTo>
                   <a:lnTo>
-                    <a:pt x="280236" y="2447837"/>
-                  </a:lnTo>
-                  <a:lnTo>
-                    <a:pt x="280236" y="2311540"/>
-                  </a:lnTo>
-                  <a:lnTo>
-                    <a:pt x="373649" y="2311540"/>
-                  </a:lnTo>
-                  <a:lnTo>
-                    <a:pt x="373649" y="1916334"/>
-                  </a:lnTo>
-                  <a:lnTo>
-                    <a:pt x="560473" y="1916334"/>
-                  </a:lnTo>
-                  <a:lnTo>
-                    <a:pt x="560473" y="1656037"/>
-                  </a:lnTo>
-                  <a:lnTo>
-                    <a:pt x="840710" y="1656037"/>
-                  </a:lnTo>
-                  <a:lnTo>
-                    <a:pt x="840710" y="1526968"/>
-                  </a:lnTo>
-                  <a:lnTo>
-                    <a:pt x="934123" y="1526968"/>
-                  </a:lnTo>
-                  <a:lnTo>
-                    <a:pt x="934123" y="1268567"/>
-                  </a:lnTo>
-                  <a:lnTo>
-                    <a:pt x="1494596" y="1268567"/>
-                  </a:lnTo>
-                  <a:lnTo>
-                    <a:pt x="1494596" y="1010590"/>
-                  </a:lnTo>
-                  <a:lnTo>
-                    <a:pt x="2335307" y="1010590"/>
-                  </a:lnTo>
-                  <a:lnTo>
-                    <a:pt x="2335307" y="881056"/>
-                  </a:lnTo>
-                  <a:lnTo>
-                    <a:pt x="2428720" y="881056"/>
-                  </a:lnTo>
-                  <a:lnTo>
-                    <a:pt x="2428720" y="623554"/>
-                  </a:lnTo>
-                  <a:lnTo>
-                    <a:pt x="2895781" y="623554"/>
-                  </a:lnTo>
-                  <a:lnTo>
-                    <a:pt x="2895781" y="494738"/>
-                  </a:lnTo>
-                  <a:lnTo>
-                    <a:pt x="3176018" y="494738"/>
-                  </a:lnTo>
-                  <a:lnTo>
-                    <a:pt x="3176018" y="368744"/>
-                  </a:lnTo>
-                  <a:lnTo>
-                    <a:pt x="3456255" y="368744"/>
-                  </a:lnTo>
-                  <a:lnTo>
-                    <a:pt x="3456255" y="244828"/>
-                  </a:lnTo>
-                  <a:lnTo>
-                    <a:pt x="4016729" y="244828"/>
-                  </a:lnTo>
-                  <a:lnTo>
-                    <a:pt x="4016729" y="122610"/>
-                  </a:lnTo>
-                  <a:lnTo>
-                    <a:pt x="7005923" y="122610"/>
+                    <a:pt x="280236" y="2450994"/>
+                  </a:lnTo>
+                  <a:lnTo>
+                    <a:pt x="280236" y="2315053"/>
+                  </a:lnTo>
+                  <a:lnTo>
+                    <a:pt x="373649" y="2315053"/>
+                  </a:lnTo>
+                  <a:lnTo>
+                    <a:pt x="373649" y="1921823"/>
+                  </a:lnTo>
+                  <a:lnTo>
+                    <a:pt x="560473" y="1921823"/>
+                  </a:lnTo>
+                  <a:lnTo>
+                    <a:pt x="560473" y="1658118"/>
+                  </a:lnTo>
+                  <a:lnTo>
+                    <a:pt x="840710" y="1658118"/>
+                  </a:lnTo>
+                  <a:lnTo>
+                    <a:pt x="840710" y="1527906"/>
+                  </a:lnTo>
+                  <a:lnTo>
+                    <a:pt x="934123" y="1527906"/>
+                  </a:lnTo>
+                  <a:lnTo>
+                    <a:pt x="934123" y="1267444"/>
+                  </a:lnTo>
+                  <a:lnTo>
+                    <a:pt x="1494596" y="1267444"/>
+                  </a:lnTo>
+                  <a:lnTo>
+                    <a:pt x="1494596" y="1007993"/>
+                  </a:lnTo>
+                  <a:lnTo>
+                    <a:pt x="2335307" y="1007993"/>
+                  </a:lnTo>
+                  <a:lnTo>
+                    <a:pt x="2335307" y="878956"/>
+                  </a:lnTo>
+                  <a:lnTo>
+                    <a:pt x="2428720" y="878956"/>
+                  </a:lnTo>
+                  <a:lnTo>
+                    <a:pt x="2428720" y="620636"/>
+                  </a:lnTo>
+                  <a:lnTo>
+                    <a:pt x="2895781" y="620636"/>
+                  </a:lnTo>
+                  <a:lnTo>
+                    <a:pt x="2895781" y="492646"/>
+                  </a:lnTo>
+                  <a:lnTo>
+                    <a:pt x="3176018" y="492646"/>
+                  </a:lnTo>
+                  <a:lnTo>
+                    <a:pt x="3176018" y="367136"/>
+                  </a:lnTo>
+                  <a:lnTo>
+                    <a:pt x="3456255" y="367136"/>
+                  </a:lnTo>
+                  <a:lnTo>
+                    <a:pt x="3456255" y="243625"/>
+                  </a:lnTo>
+                  <a:lnTo>
+                    <a:pt x="4016729" y="243625"/>
+                  </a:lnTo>
+                  <a:lnTo>
+                    <a:pt x="4016729" y="122006"/>
+                  </a:lnTo>
+                  <a:lnTo>
+                    <a:pt x="7005923" y="122006"/>
                   </a:lnTo>
                   <a:lnTo>
                     <a:pt x="7005923" y="0"/>
@@ -3235,7 +3235,7 @@
           </p:nvSpPr>
           <p:spPr>
             <a:xfrm>
-              <a:off x="692708" y="4594644"/>
+              <a:off x="692708" y="4617685"/>
               <a:ext cx="155356" cy="80101"/>
             </a:xfrm>
             <a:prstGeom prst="rect">
@@ -3281,7 +3281,7 @@
           </p:nvSpPr>
           <p:spPr>
             <a:xfrm>
-              <a:off x="692708" y="3648917"/>
+              <a:off x="692708" y="3694998"/>
               <a:ext cx="155356" cy="80101"/>
             </a:xfrm>
             <a:prstGeom prst="rect">
@@ -3327,7 +3327,7 @@
           </p:nvSpPr>
           <p:spPr>
             <a:xfrm>
-              <a:off x="692708" y="2703191"/>
+              <a:off x="692708" y="2772312"/>
               <a:ext cx="155356" cy="80101"/>
             </a:xfrm>
             <a:prstGeom prst="rect">
@@ -3900,7 +3900,7 @@
                   <a:latin typeface="Helvetica"/>
                   <a:cs typeface="Helvetica"/>
                 </a:rPr>
-                <a:t>Discrep &gt;= +25 vs &lt;+25: subHR = 3.18 (95% CI 1.20-8.40), p = 0.020</a:t>
+                <a:t>Discrep &gt;= +25 vs &lt;+25: subHR = 3.30 (95% CI 1.22-8.94), p = 0.019</a:t>
               </a:r>
             </a:p>
           </p:txBody>

--- a/docs/plots/carbo/jx_carbo_adjcif_sideeffect.pptx
+++ b/docs/plots/carbo/jx_carbo_adjcif_sideeffect.pptx
@@ -2959,7 +2959,7 @@
           </p:nvSpPr>
           <p:spPr>
             <a:xfrm>
-              <a:off x="1260991" y="4626027"/>
+              <a:off x="1260991" y="4626026"/>
               <a:ext cx="7005923" cy="872223"/>
             </a:xfrm>
             <a:custGeom>

--- a/docs/plots/carbo/jx_carbo_adjcif_sideeffect.pptx
+++ b/docs/plots/carbo/jx_carbo_adjcif_sideeffect.pptx
@@ -2271,26 +2271,26 @@
           </p:nvSpPr>
           <p:spPr>
             <a:xfrm>
-              <a:off x="910695" y="5119079"/>
-              <a:ext cx="7706515" cy="0"/>
+              <a:off x="1034151" y="5068778"/>
+              <a:ext cx="7564080" cy="0"/>
             </a:xfrm>
             <a:custGeom>
               <a:avLst/>
               <a:pathLst>
-                <a:path w="7706515" h="0">
+                <a:path w="7564080" h="0">
                   <a:moveTo>
                     <a:pt x="0" y="0"/>
                   </a:moveTo>
                   <a:lnTo>
-                    <a:pt x="7706515" y="0"/>
-                  </a:lnTo>
-                  <a:lnTo>
-                    <a:pt x="7706515" y="0"/>
+                    <a:pt x="7564080" y="0"/>
+                  </a:lnTo>
+                  <a:lnTo>
+                    <a:pt x="7564080" y="0"/>
                   </a:lnTo>
                 </a:path>
               </a:pathLst>
             </a:custGeom>
-            <a:ln w="6775" cap="flat">
+            <a:ln w="8623" cap="flat">
               <a:solidFill>
                 <a:srgbClr val="EBEBEB">
                   <a:alpha val="100000"/>
@@ -2314,26 +2314,26 @@
           </p:nvSpPr>
           <p:spPr>
             <a:xfrm>
-              <a:off x="910695" y="4196392"/>
-              <a:ext cx="7706515" cy="0"/>
+              <a:off x="1034151" y="4237023"/>
+              <a:ext cx="7564080" cy="0"/>
             </a:xfrm>
             <a:custGeom>
               <a:avLst/>
               <a:pathLst>
-                <a:path w="7706515" h="0">
+                <a:path w="7564080" h="0">
                   <a:moveTo>
                     <a:pt x="0" y="0"/>
                   </a:moveTo>
                   <a:lnTo>
-                    <a:pt x="7706515" y="0"/>
-                  </a:lnTo>
-                  <a:lnTo>
-                    <a:pt x="7706515" y="0"/>
+                    <a:pt x="7564080" y="0"/>
+                  </a:lnTo>
+                  <a:lnTo>
+                    <a:pt x="7564080" y="0"/>
                   </a:lnTo>
                 </a:path>
               </a:pathLst>
             </a:custGeom>
-            <a:ln w="6775" cap="flat">
+            <a:ln w="8623" cap="flat">
               <a:solidFill>
                 <a:srgbClr val="EBEBEB">
                   <a:alpha val="100000"/>
@@ -2357,26 +2357,26 @@
           </p:nvSpPr>
           <p:spPr>
             <a:xfrm>
-              <a:off x="910695" y="3273706"/>
-              <a:ext cx="7706515" cy="0"/>
+              <a:off x="1034151" y="3405268"/>
+              <a:ext cx="7564080" cy="0"/>
             </a:xfrm>
             <a:custGeom>
               <a:avLst/>
               <a:pathLst>
-                <a:path w="7706515" h="0">
+                <a:path w="7564080" h="0">
                   <a:moveTo>
                     <a:pt x="0" y="0"/>
                   </a:moveTo>
                   <a:lnTo>
-                    <a:pt x="7706515" y="0"/>
-                  </a:lnTo>
-                  <a:lnTo>
-                    <a:pt x="7706515" y="0"/>
+                    <a:pt x="7564080" y="0"/>
+                  </a:lnTo>
+                  <a:lnTo>
+                    <a:pt x="7564080" y="0"/>
                   </a:lnTo>
                 </a:path>
               </a:pathLst>
             </a:custGeom>
-            <a:ln w="6775" cap="flat">
+            <a:ln w="8623" cap="flat">
               <a:solidFill>
                 <a:srgbClr val="EBEBEB">
                   <a:alpha val="100000"/>
@@ -2400,15 +2400,15 @@
           </p:nvSpPr>
           <p:spPr>
             <a:xfrm>
-              <a:off x="1914877" y="2583293"/>
-              <a:ext cx="0" cy="3139848"/>
+              <a:off x="2019773" y="2782896"/>
+              <a:ext cx="0" cy="2830414"/>
             </a:xfrm>
             <a:custGeom>
               <a:avLst/>
               <a:pathLst>
-                <a:path w="0" h="3139848">
+                <a:path w="0" h="2830414">
                   <a:moveTo>
-                    <a:pt x="0" y="3139848"/>
+                    <a:pt x="0" y="2830414"/>
                   </a:moveTo>
                   <a:lnTo>
                     <a:pt x="0" y="0"/>
@@ -2419,7 +2419,7 @@
                 </a:path>
               </a:pathLst>
             </a:custGeom>
-            <a:ln w="6775" cap="flat">
+            <a:ln w="8623" cap="flat">
               <a:solidFill>
                 <a:srgbClr val="EBEBEB">
                   <a:alpha val="100000"/>
@@ -2443,15 +2443,15 @@
           </p:nvSpPr>
           <p:spPr>
             <a:xfrm>
-              <a:off x="3783123" y="2583293"/>
-              <a:ext cx="0" cy="3139848"/>
+              <a:off x="3853490" y="2782896"/>
+              <a:ext cx="0" cy="2830414"/>
             </a:xfrm>
             <a:custGeom>
               <a:avLst/>
               <a:pathLst>
-                <a:path w="0" h="3139848">
+                <a:path w="0" h="2830414">
                   <a:moveTo>
-                    <a:pt x="0" y="3139848"/>
+                    <a:pt x="0" y="2830414"/>
                   </a:moveTo>
                   <a:lnTo>
                     <a:pt x="0" y="0"/>
@@ -2462,7 +2462,7 @@
                 </a:path>
               </a:pathLst>
             </a:custGeom>
-            <a:ln w="6775" cap="flat">
+            <a:ln w="8623" cap="flat">
               <a:solidFill>
                 <a:srgbClr val="EBEBEB">
                   <a:alpha val="100000"/>
@@ -2486,15 +2486,15 @@
           </p:nvSpPr>
           <p:spPr>
             <a:xfrm>
-              <a:off x="5651370" y="2583293"/>
-              <a:ext cx="0" cy="3139848"/>
+              <a:off x="5687207" y="2782896"/>
+              <a:ext cx="0" cy="2830414"/>
             </a:xfrm>
             <a:custGeom>
               <a:avLst/>
               <a:pathLst>
-                <a:path w="0" h="3139848">
+                <a:path w="0" h="2830414">
                   <a:moveTo>
-                    <a:pt x="0" y="3139848"/>
+                    <a:pt x="0" y="2830414"/>
                   </a:moveTo>
                   <a:lnTo>
                     <a:pt x="0" y="0"/>
@@ -2505,7 +2505,7 @@
                 </a:path>
               </a:pathLst>
             </a:custGeom>
-            <a:ln w="6775" cap="flat">
+            <a:ln w="8623" cap="flat">
               <a:solidFill>
                 <a:srgbClr val="EBEBEB">
                   <a:alpha val="100000"/>
@@ -2529,15 +2529,15 @@
           </p:nvSpPr>
           <p:spPr>
             <a:xfrm>
-              <a:off x="7519616" y="2583293"/>
-              <a:ext cx="0" cy="3139848"/>
+              <a:off x="7520923" y="2782896"/>
+              <a:ext cx="0" cy="2830414"/>
             </a:xfrm>
             <a:custGeom>
               <a:avLst/>
               <a:pathLst>
-                <a:path w="0" h="3139848">
+                <a:path w="0" h="2830414">
                   <a:moveTo>
-                    <a:pt x="0" y="3139848"/>
+                    <a:pt x="0" y="2830414"/>
                   </a:moveTo>
                   <a:lnTo>
                     <a:pt x="0" y="0"/>
@@ -2548,7 +2548,7 @@
                 </a:path>
               </a:pathLst>
             </a:custGeom>
-            <a:ln w="6775" cap="flat">
+            <a:ln w="8623" cap="flat">
               <a:solidFill>
                 <a:srgbClr val="EBEBEB">
                   <a:alpha val="100000"/>
@@ -2572,26 +2572,26 @@
           </p:nvSpPr>
           <p:spPr>
             <a:xfrm>
-              <a:off x="910695" y="5580422"/>
-              <a:ext cx="7706515" cy="0"/>
+              <a:off x="1034151" y="5484655"/>
+              <a:ext cx="7564080" cy="0"/>
             </a:xfrm>
             <a:custGeom>
               <a:avLst/>
               <a:pathLst>
-                <a:path w="7706515" h="0">
+                <a:path w="7564080" h="0">
                   <a:moveTo>
                     <a:pt x="0" y="0"/>
                   </a:moveTo>
                   <a:lnTo>
-                    <a:pt x="7706515" y="0"/>
-                  </a:lnTo>
-                  <a:lnTo>
-                    <a:pt x="7706515" y="0"/>
+                    <a:pt x="7564080" y="0"/>
+                  </a:lnTo>
+                  <a:lnTo>
+                    <a:pt x="7564080" y="0"/>
                   </a:lnTo>
                 </a:path>
               </a:pathLst>
             </a:custGeom>
-            <a:ln w="13550" cap="flat">
+            <a:ln w="17246" cap="flat">
               <a:solidFill>
                 <a:srgbClr val="EBEBEB">
                   <a:alpha val="100000"/>
@@ -2615,26 +2615,26 @@
           </p:nvSpPr>
           <p:spPr>
             <a:xfrm>
-              <a:off x="910695" y="4657735"/>
-              <a:ext cx="7706515" cy="0"/>
+              <a:off x="1034151" y="4652900"/>
+              <a:ext cx="7564080" cy="0"/>
             </a:xfrm>
             <a:custGeom>
               <a:avLst/>
               <a:pathLst>
-                <a:path w="7706515" h="0">
+                <a:path w="7564080" h="0">
                   <a:moveTo>
                     <a:pt x="0" y="0"/>
                   </a:moveTo>
                   <a:lnTo>
-                    <a:pt x="7706515" y="0"/>
-                  </a:lnTo>
-                  <a:lnTo>
-                    <a:pt x="7706515" y="0"/>
+                    <a:pt x="7564080" y="0"/>
+                  </a:lnTo>
+                  <a:lnTo>
+                    <a:pt x="7564080" y="0"/>
                   </a:lnTo>
                 </a:path>
               </a:pathLst>
             </a:custGeom>
-            <a:ln w="13550" cap="flat">
+            <a:ln w="17246" cap="flat">
               <a:solidFill>
                 <a:srgbClr val="EBEBEB">
                   <a:alpha val="100000"/>
@@ -2658,26 +2658,26 @@
           </p:nvSpPr>
           <p:spPr>
             <a:xfrm>
-              <a:off x="910695" y="3735049"/>
-              <a:ext cx="7706515" cy="0"/>
+              <a:off x="1034151" y="3821145"/>
+              <a:ext cx="7564080" cy="0"/>
             </a:xfrm>
             <a:custGeom>
               <a:avLst/>
               <a:pathLst>
-                <a:path w="7706515" h="0">
+                <a:path w="7564080" h="0">
                   <a:moveTo>
                     <a:pt x="0" y="0"/>
                   </a:moveTo>
                   <a:lnTo>
-                    <a:pt x="7706515" y="0"/>
-                  </a:lnTo>
-                  <a:lnTo>
-                    <a:pt x="7706515" y="0"/>
+                    <a:pt x="7564080" y="0"/>
+                  </a:lnTo>
+                  <a:lnTo>
+                    <a:pt x="7564080" y="0"/>
                   </a:lnTo>
                 </a:path>
               </a:pathLst>
             </a:custGeom>
-            <a:ln w="13550" cap="flat">
+            <a:ln w="17246" cap="flat">
               <a:solidFill>
                 <a:srgbClr val="EBEBEB">
                   <a:alpha val="100000"/>
@@ -2701,26 +2701,26 @@
           </p:nvSpPr>
           <p:spPr>
             <a:xfrm>
-              <a:off x="910695" y="2812362"/>
-              <a:ext cx="7706515" cy="0"/>
+              <a:off x="1034151" y="2989390"/>
+              <a:ext cx="7564080" cy="0"/>
             </a:xfrm>
             <a:custGeom>
               <a:avLst/>
               <a:pathLst>
-                <a:path w="7706515" h="0">
+                <a:path w="7564080" h="0">
                   <a:moveTo>
                     <a:pt x="0" y="0"/>
                   </a:moveTo>
                   <a:lnTo>
-                    <a:pt x="7706515" y="0"/>
-                  </a:lnTo>
-                  <a:lnTo>
-                    <a:pt x="7706515" y="0"/>
+                    <a:pt x="7564080" y="0"/>
+                  </a:lnTo>
+                  <a:lnTo>
+                    <a:pt x="7564080" y="0"/>
                   </a:lnTo>
                 </a:path>
               </a:pathLst>
             </a:custGeom>
-            <a:ln w="13550" cap="flat">
+            <a:ln w="17246" cap="flat">
               <a:solidFill>
                 <a:srgbClr val="EBEBEB">
                   <a:alpha val="100000"/>
@@ -2744,15 +2744,15 @@
           </p:nvSpPr>
           <p:spPr>
             <a:xfrm>
-              <a:off x="980754" y="2583293"/>
-              <a:ext cx="0" cy="3139848"/>
+              <a:off x="1102915" y="2782896"/>
+              <a:ext cx="0" cy="2830414"/>
             </a:xfrm>
             <a:custGeom>
               <a:avLst/>
               <a:pathLst>
-                <a:path w="0" h="3139848">
+                <a:path w="0" h="2830414">
                   <a:moveTo>
-                    <a:pt x="0" y="3139848"/>
+                    <a:pt x="0" y="2830414"/>
                   </a:moveTo>
                   <a:lnTo>
                     <a:pt x="0" y="0"/>
@@ -2763,7 +2763,7 @@
                 </a:path>
               </a:pathLst>
             </a:custGeom>
-            <a:ln w="13550" cap="flat">
+            <a:ln w="17246" cap="flat">
               <a:solidFill>
                 <a:srgbClr val="EBEBEB">
                   <a:alpha val="100000"/>
@@ -2787,15 +2787,15 @@
           </p:nvSpPr>
           <p:spPr>
             <a:xfrm>
-              <a:off x="2849000" y="2583293"/>
-              <a:ext cx="0" cy="3139848"/>
+              <a:off x="2936632" y="2782896"/>
+              <a:ext cx="0" cy="2830414"/>
             </a:xfrm>
             <a:custGeom>
               <a:avLst/>
               <a:pathLst>
-                <a:path w="0" h="3139848">
+                <a:path w="0" h="2830414">
                   <a:moveTo>
-                    <a:pt x="0" y="3139848"/>
+                    <a:pt x="0" y="2830414"/>
                   </a:moveTo>
                   <a:lnTo>
                     <a:pt x="0" y="0"/>
@@ -2806,7 +2806,7 @@
                 </a:path>
               </a:pathLst>
             </a:custGeom>
-            <a:ln w="13550" cap="flat">
+            <a:ln w="17246" cap="flat">
               <a:solidFill>
                 <a:srgbClr val="EBEBEB">
                   <a:alpha val="100000"/>
@@ -2830,15 +2830,15 @@
           </p:nvSpPr>
           <p:spPr>
             <a:xfrm>
-              <a:off x="4717246" y="2583293"/>
-              <a:ext cx="0" cy="3139848"/>
+              <a:off x="4770348" y="2782896"/>
+              <a:ext cx="0" cy="2830414"/>
             </a:xfrm>
             <a:custGeom>
               <a:avLst/>
               <a:pathLst>
-                <a:path w="0" h="3139848">
+                <a:path w="0" h="2830414">
                   <a:moveTo>
-                    <a:pt x="0" y="3139848"/>
+                    <a:pt x="0" y="2830414"/>
                   </a:moveTo>
                   <a:lnTo>
                     <a:pt x="0" y="0"/>
@@ -2849,7 +2849,7 @@
                 </a:path>
               </a:pathLst>
             </a:custGeom>
-            <a:ln w="13550" cap="flat">
+            <a:ln w="17246" cap="flat">
               <a:solidFill>
                 <a:srgbClr val="EBEBEB">
                   <a:alpha val="100000"/>
@@ -2873,15 +2873,15 @@
           </p:nvSpPr>
           <p:spPr>
             <a:xfrm>
-              <a:off x="6585493" y="2583293"/>
-              <a:ext cx="0" cy="3139848"/>
+              <a:off x="6604065" y="2782896"/>
+              <a:ext cx="0" cy="2830414"/>
             </a:xfrm>
             <a:custGeom>
               <a:avLst/>
               <a:pathLst>
-                <a:path w="0" h="3139848">
+                <a:path w="0" h="2830414">
                   <a:moveTo>
-                    <a:pt x="0" y="3139848"/>
+                    <a:pt x="0" y="2830414"/>
                   </a:moveTo>
                   <a:lnTo>
                     <a:pt x="0" y="0"/>
@@ -2892,7 +2892,7 @@
                 </a:path>
               </a:pathLst>
             </a:custGeom>
-            <a:ln w="13550" cap="flat">
+            <a:ln w="17246" cap="flat">
               <a:solidFill>
                 <a:srgbClr val="EBEBEB">
                   <a:alpha val="100000"/>
@@ -2916,15 +2916,15 @@
           </p:nvSpPr>
           <p:spPr>
             <a:xfrm>
-              <a:off x="8453739" y="2583293"/>
-              <a:ext cx="0" cy="3139848"/>
+              <a:off x="8437781" y="2782896"/>
+              <a:ext cx="0" cy="2830414"/>
             </a:xfrm>
             <a:custGeom>
               <a:avLst/>
               <a:pathLst>
-                <a:path w="0" h="3139848">
+                <a:path w="0" h="2830414">
                   <a:moveTo>
-                    <a:pt x="0" y="3139848"/>
+                    <a:pt x="0" y="2830414"/>
                   </a:moveTo>
                   <a:lnTo>
                     <a:pt x="0" y="0"/>
@@ -2935,7 +2935,7 @@
                 </a:path>
               </a:pathLst>
             </a:custGeom>
-            <a:ln w="13550" cap="flat">
+            <a:ln w="17246" cap="flat">
               <a:solidFill>
                 <a:srgbClr val="EBEBEB">
                   <a:alpha val="100000"/>
@@ -2959,93 +2959,93 @@
           </p:nvSpPr>
           <p:spPr>
             <a:xfrm>
-              <a:off x="1260991" y="4626026"/>
-              <a:ext cx="7005923" cy="872223"/>
+              <a:off x="1377973" y="4624317"/>
+              <a:ext cx="6876437" cy="786265"/>
             </a:xfrm>
             <a:custGeom>
               <a:avLst/>
               <a:pathLst>
-                <a:path w="7005923" h="872223">
+                <a:path w="6876437" h="786265">
                   <a:moveTo>
-                    <a:pt x="0" y="872223"/>
+                    <a:pt x="0" y="786265"/>
                   </a:moveTo>
                   <a:lnTo>
-                    <a:pt x="280236" y="872223"/>
-                  </a:lnTo>
-                  <a:lnTo>
-                    <a:pt x="280236" y="829618"/>
-                  </a:lnTo>
-                  <a:lnTo>
-                    <a:pt x="373649" y="829618"/>
-                  </a:lnTo>
-                  <a:lnTo>
-                    <a:pt x="373649" y="703022"/>
-                  </a:lnTo>
-                  <a:lnTo>
-                    <a:pt x="560473" y="703022"/>
-                  </a:lnTo>
-                  <a:lnTo>
-                    <a:pt x="560473" y="615195"/>
-                  </a:lnTo>
-                  <a:lnTo>
-                    <a:pt x="840710" y="615195"/>
-                  </a:lnTo>
-                  <a:lnTo>
-                    <a:pt x="840710" y="570917"/>
-                  </a:lnTo>
-                  <a:lnTo>
-                    <a:pt x="934123" y="570917"/>
-                  </a:lnTo>
-                  <a:lnTo>
-                    <a:pt x="934123" y="480465"/>
-                  </a:lnTo>
-                  <a:lnTo>
-                    <a:pt x="1494596" y="480465"/>
-                  </a:lnTo>
-                  <a:lnTo>
-                    <a:pt x="1494596" y="387757"/>
-                  </a:lnTo>
-                  <a:lnTo>
-                    <a:pt x="2335307" y="387757"/>
-                  </a:lnTo>
-                  <a:lnTo>
-                    <a:pt x="2335307" y="340635"/>
-                  </a:lnTo>
-                  <a:lnTo>
-                    <a:pt x="2428720" y="340635"/>
-                  </a:lnTo>
-                  <a:lnTo>
-                    <a:pt x="2428720" y="244185"/>
-                  </a:lnTo>
-                  <a:lnTo>
-                    <a:pt x="2895781" y="244185"/>
-                  </a:lnTo>
-                  <a:lnTo>
-                    <a:pt x="2895781" y="195310"/>
-                  </a:lnTo>
-                  <a:lnTo>
-                    <a:pt x="3176018" y="195310"/>
-                  </a:lnTo>
-                  <a:lnTo>
-                    <a:pt x="3176018" y="146656"/>
-                  </a:lnTo>
-                  <a:lnTo>
-                    <a:pt x="3456255" y="146656"/>
-                  </a:lnTo>
-                  <a:lnTo>
-                    <a:pt x="3456255" y="98054"/>
-                  </a:lnTo>
-                  <a:lnTo>
-                    <a:pt x="4016729" y="98054"/>
-                  </a:lnTo>
-                  <a:lnTo>
-                    <a:pt x="4016729" y="49475"/>
-                  </a:lnTo>
-                  <a:lnTo>
-                    <a:pt x="7005923" y="49475"/>
-                  </a:lnTo>
-                  <a:lnTo>
-                    <a:pt x="7005923" y="0"/>
+                    <a:pt x="275057" y="786265"/>
+                  </a:lnTo>
+                  <a:lnTo>
+                    <a:pt x="275057" y="747859"/>
+                  </a:lnTo>
+                  <a:lnTo>
+                    <a:pt x="366743" y="747859"/>
+                  </a:lnTo>
+                  <a:lnTo>
+                    <a:pt x="366743" y="633738"/>
+                  </a:lnTo>
+                  <a:lnTo>
+                    <a:pt x="550114" y="633738"/>
+                  </a:lnTo>
+                  <a:lnTo>
+                    <a:pt x="550114" y="554567"/>
+                  </a:lnTo>
+                  <a:lnTo>
+                    <a:pt x="825172" y="554567"/>
+                  </a:lnTo>
+                  <a:lnTo>
+                    <a:pt x="825172" y="514653"/>
+                  </a:lnTo>
+                  <a:lnTo>
+                    <a:pt x="916858" y="514653"/>
+                  </a:lnTo>
+                  <a:lnTo>
+                    <a:pt x="916858" y="433115"/>
+                  </a:lnTo>
+                  <a:lnTo>
+                    <a:pt x="1466973" y="433115"/>
+                  </a:lnTo>
+                  <a:lnTo>
+                    <a:pt x="1466973" y="349543"/>
+                  </a:lnTo>
+                  <a:lnTo>
+                    <a:pt x="2292145" y="349543"/>
+                  </a:lnTo>
+                  <a:lnTo>
+                    <a:pt x="2292145" y="307065"/>
+                  </a:lnTo>
+                  <a:lnTo>
+                    <a:pt x="2383831" y="307065"/>
+                  </a:lnTo>
+                  <a:lnTo>
+                    <a:pt x="2383831" y="220120"/>
+                  </a:lnTo>
+                  <a:lnTo>
+                    <a:pt x="2842260" y="220120"/>
+                  </a:lnTo>
+                  <a:lnTo>
+                    <a:pt x="2842260" y="176062"/>
+                  </a:lnTo>
+                  <a:lnTo>
+                    <a:pt x="3117318" y="176062"/>
+                  </a:lnTo>
+                  <a:lnTo>
+                    <a:pt x="3117318" y="132203"/>
+                  </a:lnTo>
+                  <a:lnTo>
+                    <a:pt x="3392375" y="132203"/>
+                  </a:lnTo>
+                  <a:lnTo>
+                    <a:pt x="3392375" y="88391"/>
+                  </a:lnTo>
+                  <a:lnTo>
+                    <a:pt x="3942490" y="88391"/>
+                  </a:lnTo>
+                  <a:lnTo>
+                    <a:pt x="3942490" y="44599"/>
+                  </a:lnTo>
+                  <a:lnTo>
+                    <a:pt x="6876437" y="44599"/>
+                  </a:lnTo>
+                  <a:lnTo>
+                    <a:pt x="6876437" y="0"/>
                   </a:lnTo>
                 </a:path>
               </a:pathLst>
@@ -3074,93 +3074,93 @@
           </p:nvSpPr>
           <p:spPr>
             <a:xfrm>
-              <a:off x="1260991" y="2861938"/>
-              <a:ext cx="7005923" cy="2450994"/>
+              <a:off x="1377973" y="3034080"/>
+              <a:ext cx="6876437" cy="2209446"/>
             </a:xfrm>
             <a:custGeom>
               <a:avLst/>
               <a:pathLst>
-                <a:path w="7005923" h="2450994">
+                <a:path w="6876437" h="2209446">
                   <a:moveTo>
-                    <a:pt x="0" y="2450994"/>
+                    <a:pt x="0" y="2209446"/>
                   </a:moveTo>
                   <a:lnTo>
-                    <a:pt x="280236" y="2450994"/>
-                  </a:lnTo>
-                  <a:lnTo>
-                    <a:pt x="280236" y="2315053"/>
-                  </a:lnTo>
-                  <a:lnTo>
-                    <a:pt x="373649" y="2315053"/>
-                  </a:lnTo>
-                  <a:lnTo>
-                    <a:pt x="373649" y="1921823"/>
-                  </a:lnTo>
-                  <a:lnTo>
-                    <a:pt x="560473" y="1921823"/>
-                  </a:lnTo>
-                  <a:lnTo>
-                    <a:pt x="560473" y="1658118"/>
-                  </a:lnTo>
-                  <a:lnTo>
-                    <a:pt x="840710" y="1658118"/>
-                  </a:lnTo>
-                  <a:lnTo>
-                    <a:pt x="840710" y="1527906"/>
-                  </a:lnTo>
-                  <a:lnTo>
-                    <a:pt x="934123" y="1527906"/>
-                  </a:lnTo>
-                  <a:lnTo>
-                    <a:pt x="934123" y="1267444"/>
-                  </a:lnTo>
-                  <a:lnTo>
-                    <a:pt x="1494596" y="1267444"/>
-                  </a:lnTo>
-                  <a:lnTo>
-                    <a:pt x="1494596" y="1007993"/>
-                  </a:lnTo>
-                  <a:lnTo>
-                    <a:pt x="2335307" y="1007993"/>
-                  </a:lnTo>
-                  <a:lnTo>
-                    <a:pt x="2335307" y="878956"/>
-                  </a:lnTo>
-                  <a:lnTo>
-                    <a:pt x="2428720" y="878956"/>
-                  </a:lnTo>
-                  <a:lnTo>
-                    <a:pt x="2428720" y="620636"/>
-                  </a:lnTo>
-                  <a:lnTo>
-                    <a:pt x="2895781" y="620636"/>
-                  </a:lnTo>
-                  <a:lnTo>
-                    <a:pt x="2895781" y="492646"/>
-                  </a:lnTo>
-                  <a:lnTo>
-                    <a:pt x="3176018" y="492646"/>
-                  </a:lnTo>
-                  <a:lnTo>
-                    <a:pt x="3176018" y="367136"/>
-                  </a:lnTo>
-                  <a:lnTo>
-                    <a:pt x="3456255" y="367136"/>
-                  </a:lnTo>
-                  <a:lnTo>
-                    <a:pt x="3456255" y="243625"/>
-                  </a:lnTo>
-                  <a:lnTo>
-                    <a:pt x="4016729" y="243625"/>
-                  </a:lnTo>
-                  <a:lnTo>
-                    <a:pt x="4016729" y="122006"/>
-                  </a:lnTo>
-                  <a:lnTo>
-                    <a:pt x="7005923" y="122006"/>
-                  </a:lnTo>
-                  <a:lnTo>
-                    <a:pt x="7005923" y="0"/>
+                    <a:pt x="275057" y="2209446"/>
+                  </a:lnTo>
+                  <a:lnTo>
+                    <a:pt x="275057" y="2086902"/>
+                  </a:lnTo>
+                  <a:lnTo>
+                    <a:pt x="366743" y="2086902"/>
+                  </a:lnTo>
+                  <a:lnTo>
+                    <a:pt x="366743" y="1732426"/>
+                  </a:lnTo>
+                  <a:lnTo>
+                    <a:pt x="550114" y="1732426"/>
+                  </a:lnTo>
+                  <a:lnTo>
+                    <a:pt x="550114" y="1494709"/>
+                  </a:lnTo>
+                  <a:lnTo>
+                    <a:pt x="825172" y="1494709"/>
+                  </a:lnTo>
+                  <a:lnTo>
+                    <a:pt x="825172" y="1377329"/>
+                  </a:lnTo>
+                  <a:lnTo>
+                    <a:pt x="916858" y="1377329"/>
+                  </a:lnTo>
+                  <a:lnTo>
+                    <a:pt x="916858" y="1142536"/>
+                  </a:lnTo>
+                  <a:lnTo>
+                    <a:pt x="1466973" y="1142536"/>
+                  </a:lnTo>
+                  <a:lnTo>
+                    <a:pt x="1466973" y="908655"/>
+                  </a:lnTo>
+                  <a:lnTo>
+                    <a:pt x="2292145" y="908655"/>
+                  </a:lnTo>
+                  <a:lnTo>
+                    <a:pt x="2292145" y="792334"/>
+                  </a:lnTo>
+                  <a:lnTo>
+                    <a:pt x="2383831" y="792334"/>
+                  </a:lnTo>
+                  <a:lnTo>
+                    <a:pt x="2383831" y="559472"/>
+                  </a:lnTo>
+                  <a:lnTo>
+                    <a:pt x="2842260" y="559472"/>
+                  </a:lnTo>
+                  <a:lnTo>
+                    <a:pt x="2842260" y="444095"/>
+                  </a:lnTo>
+                  <a:lnTo>
+                    <a:pt x="3117318" y="444095"/>
+                  </a:lnTo>
+                  <a:lnTo>
+                    <a:pt x="3117318" y="330954"/>
+                  </a:lnTo>
+                  <a:lnTo>
+                    <a:pt x="3392375" y="330954"/>
+                  </a:lnTo>
+                  <a:lnTo>
+                    <a:pt x="3392375" y="219616"/>
+                  </a:lnTo>
+                  <a:lnTo>
+                    <a:pt x="3942490" y="219616"/>
+                  </a:lnTo>
+                  <a:lnTo>
+                    <a:pt x="3942490" y="109982"/>
+                  </a:lnTo>
+                  <a:lnTo>
+                    <a:pt x="6876437" y="109982"/>
+                  </a:lnTo>
+                  <a:lnTo>
+                    <a:pt x="6876437" y="0"/>
                   </a:lnTo>
                 </a:path>
               </a:pathLst>
@@ -3189,8 +3189,8 @@
           </p:nvSpPr>
           <p:spPr>
             <a:xfrm>
-              <a:off x="692708" y="5540371"/>
-              <a:ext cx="155356" cy="80101"/>
+              <a:off x="756929" y="5433678"/>
+              <a:ext cx="197510" cy="101955"/>
             </a:xfrm>
             <a:prstGeom prst="rect">
               <a:avLst/>
@@ -3203,7 +3203,7 @@
             <a:p>
               <a:pPr algn="l" marL="0" marR="0" indent="0">
                 <a:lnSpc>
-                  <a:spcPts val="880"/>
+                  <a:spcPts val="1120"/>
                 </a:lnSpc>
                 <a:spcBef>
                   <a:spcPts val="0"/>
@@ -3213,7 +3213,7 @@
                 </a:spcAft>
               </a:pPr>
               <a:r>
-                <a:rPr sz="880">
+                <a:rPr sz="1120">
                   <a:solidFill>
                     <a:srgbClr val="4D4D4D">
                       <a:alpha val="100000"/>
@@ -3235,8 +3235,8 @@
           </p:nvSpPr>
           <p:spPr>
             <a:xfrm>
-              <a:off x="692708" y="4617685"/>
-              <a:ext cx="155356" cy="80101"/>
+              <a:off x="756929" y="4601923"/>
+              <a:ext cx="197510" cy="101955"/>
             </a:xfrm>
             <a:prstGeom prst="rect">
               <a:avLst/>
@@ -3249,7 +3249,7 @@
             <a:p>
               <a:pPr algn="l" marL="0" marR="0" indent="0">
                 <a:lnSpc>
-                  <a:spcPts val="880"/>
+                  <a:spcPts val="1120"/>
                 </a:lnSpc>
                 <a:spcBef>
                   <a:spcPts val="0"/>
@@ -3259,7 +3259,7 @@
                 </a:spcAft>
               </a:pPr>
               <a:r>
-                <a:rPr sz="880">
+                <a:rPr sz="1120">
                   <a:solidFill>
                     <a:srgbClr val="4D4D4D">
                       <a:alpha val="100000"/>
@@ -3281,8 +3281,8 @@
           </p:nvSpPr>
           <p:spPr>
             <a:xfrm>
-              <a:off x="692708" y="3694998"/>
-              <a:ext cx="155356" cy="80101"/>
+              <a:off x="756929" y="3770168"/>
+              <a:ext cx="197510" cy="101955"/>
             </a:xfrm>
             <a:prstGeom prst="rect">
               <a:avLst/>
@@ -3295,7 +3295,7 @@
             <a:p>
               <a:pPr algn="l" marL="0" marR="0" indent="0">
                 <a:lnSpc>
-                  <a:spcPts val="880"/>
+                  <a:spcPts val="1120"/>
                 </a:lnSpc>
                 <a:spcBef>
                   <a:spcPts val="0"/>
@@ -3305,7 +3305,7 @@
                 </a:spcAft>
               </a:pPr>
               <a:r>
-                <a:rPr sz="880">
+                <a:rPr sz="1120">
                   <a:solidFill>
                     <a:srgbClr val="4D4D4D">
                       <a:alpha val="100000"/>
@@ -3327,8 +3327,8 @@
           </p:nvSpPr>
           <p:spPr>
             <a:xfrm>
-              <a:off x="692708" y="2772312"/>
-              <a:ext cx="155356" cy="80101"/>
+              <a:off x="756929" y="2938413"/>
+              <a:ext cx="197510" cy="101955"/>
             </a:xfrm>
             <a:prstGeom prst="rect">
               <a:avLst/>
@@ -3341,7 +3341,7 @@
             <a:p>
               <a:pPr algn="l" marL="0" marR="0" indent="0">
                 <a:lnSpc>
-                  <a:spcPts val="880"/>
+                  <a:spcPts val="1120"/>
                 </a:lnSpc>
                 <a:spcBef>
                   <a:spcPts val="0"/>
@@ -3351,7 +3351,7 @@
                 </a:spcAft>
               </a:pPr>
               <a:r>
-                <a:rPr sz="880">
+                <a:rPr sz="1120">
                   <a:solidFill>
                     <a:srgbClr val="4D4D4D">
                       <a:alpha val="100000"/>
@@ -3373,8 +3373,8 @@
           </p:nvSpPr>
           <p:spPr>
             <a:xfrm>
-              <a:off x="949664" y="5785772"/>
-              <a:ext cx="62179" cy="80101"/>
+              <a:off x="1063413" y="5693022"/>
+              <a:ext cx="79004" cy="101955"/>
             </a:xfrm>
             <a:prstGeom prst="rect">
               <a:avLst/>
@@ -3387,7 +3387,7 @@
             <a:p>
               <a:pPr algn="l" marL="0" marR="0" indent="0">
                 <a:lnSpc>
-                  <a:spcPts val="880"/>
+                  <a:spcPts val="1120"/>
                 </a:lnSpc>
                 <a:spcBef>
                   <a:spcPts val="0"/>
@@ -3397,7 +3397,7 @@
                 </a:spcAft>
               </a:pPr>
               <a:r>
-                <a:rPr sz="880">
+                <a:rPr sz="1120">
                   <a:solidFill>
                     <a:srgbClr val="4D4D4D">
                       <a:alpha val="100000"/>
@@ -3419,8 +3419,8 @@
           </p:nvSpPr>
           <p:spPr>
             <a:xfrm>
-              <a:off x="2786821" y="5785772"/>
-              <a:ext cx="124358" cy="80101"/>
+              <a:off x="2857628" y="5693022"/>
+              <a:ext cx="158008" cy="101955"/>
             </a:xfrm>
             <a:prstGeom prst="rect">
               <a:avLst/>
@@ -3433,7 +3433,7 @@
             <a:p>
               <a:pPr algn="l" marL="0" marR="0" indent="0">
                 <a:lnSpc>
-                  <a:spcPts val="880"/>
+                  <a:spcPts val="1120"/>
                 </a:lnSpc>
                 <a:spcBef>
                   <a:spcPts val="0"/>
@@ -3443,7 +3443,7 @@
                 </a:spcAft>
               </a:pPr>
               <a:r>
-                <a:rPr sz="880">
+                <a:rPr sz="1120">
                   <a:solidFill>
                     <a:srgbClr val="4D4D4D">
                       <a:alpha val="100000"/>
@@ -3465,8 +3465,8 @@
           </p:nvSpPr>
           <p:spPr>
             <a:xfrm>
-              <a:off x="4655067" y="5785772"/>
-              <a:ext cx="124358" cy="80101"/>
+              <a:off x="4691344" y="5693022"/>
+              <a:ext cx="158008" cy="101955"/>
             </a:xfrm>
             <a:prstGeom prst="rect">
               <a:avLst/>
@@ -3479,7 +3479,7 @@
             <a:p>
               <a:pPr algn="l" marL="0" marR="0" indent="0">
                 <a:lnSpc>
-                  <a:spcPts val="880"/>
+                  <a:spcPts val="1120"/>
                 </a:lnSpc>
                 <a:spcBef>
                   <a:spcPts val="0"/>
@@ -3489,7 +3489,7 @@
                 </a:spcAft>
               </a:pPr>
               <a:r>
-                <a:rPr sz="880">
+                <a:rPr sz="1120">
                   <a:solidFill>
                     <a:srgbClr val="4D4D4D">
                       <a:alpha val="100000"/>
@@ -3511,8 +3511,8 @@
           </p:nvSpPr>
           <p:spPr>
             <a:xfrm>
-              <a:off x="6523313" y="5785772"/>
-              <a:ext cx="124358" cy="80101"/>
+              <a:off x="6525061" y="5693022"/>
+              <a:ext cx="158008" cy="101955"/>
             </a:xfrm>
             <a:prstGeom prst="rect">
               <a:avLst/>
@@ -3525,7 +3525,7 @@
             <a:p>
               <a:pPr algn="l" marL="0" marR="0" indent="0">
                 <a:lnSpc>
-                  <a:spcPts val="880"/>
+                  <a:spcPts val="1120"/>
                 </a:lnSpc>
                 <a:spcBef>
                   <a:spcPts val="0"/>
@@ -3535,7 +3535,7 @@
                 </a:spcAft>
               </a:pPr>
               <a:r>
-                <a:rPr sz="880">
+                <a:rPr sz="1120">
                   <a:solidFill>
                     <a:srgbClr val="4D4D4D">
                       <a:alpha val="100000"/>
@@ -3557,8 +3557,8 @@
           </p:nvSpPr>
           <p:spPr>
             <a:xfrm>
-              <a:off x="8391560" y="5785772"/>
-              <a:ext cx="124358" cy="80101"/>
+              <a:off x="8358777" y="5693022"/>
+              <a:ext cx="158008" cy="101955"/>
             </a:xfrm>
             <a:prstGeom prst="rect">
               <a:avLst/>
@@ -3571,7 +3571,7 @@
             <a:p>
               <a:pPr algn="l" marL="0" marR="0" indent="0">
                 <a:lnSpc>
-                  <a:spcPts val="880"/>
+                  <a:spcPts val="1120"/>
                 </a:lnSpc>
                 <a:spcBef>
                   <a:spcPts val="0"/>
@@ -3581,7 +3581,7 @@
                 </a:spcAft>
               </a:pPr>
               <a:r>
-                <a:rPr sz="880">
+                <a:rPr sz="1120">
                   <a:solidFill>
                     <a:srgbClr val="4D4D4D">
                       <a:alpha val="100000"/>
@@ -3603,8 +3603,8 @@
           </p:nvSpPr>
           <p:spPr>
             <a:xfrm>
-              <a:off x="4166072" y="5925448"/>
-              <a:ext cx="1195760" cy="100218"/>
+              <a:off x="4055456" y="5870717"/>
+              <a:ext cx="1521470" cy="127558"/>
             </a:xfrm>
             <a:prstGeom prst="rect">
               <a:avLst/>
@@ -3617,7 +3617,7 @@
             <a:p>
               <a:pPr algn="l" marL="0" marR="0" indent="0">
                 <a:lnSpc>
-                  <a:spcPts val="1100"/>
+                  <a:spcPts val="1400"/>
                 </a:lnSpc>
                 <a:spcBef>
                   <a:spcPts val="0"/>
@@ -3627,7 +3627,7 @@
                 </a:spcAft>
               </a:pPr>
               <a:r>
-                <a:rPr sz="1100">
+                <a:rPr sz="1400">
                   <a:solidFill>
                     <a:srgbClr val="000000">
                       <a:alpha val="100000"/>
@@ -3649,8 +3649,8 @@
           </p:nvSpPr>
           <p:spPr>
             <a:xfrm rot="-5400000">
-              <a:off x="-87047" y="4103109"/>
-              <a:ext cx="1327891" cy="100218"/>
+              <a:off x="-235221" y="4134324"/>
+              <a:ext cx="1689536" cy="127558"/>
             </a:xfrm>
             <a:prstGeom prst="rect">
               <a:avLst/>
@@ -3663,7 +3663,7 @@
             <a:p>
               <a:pPr algn="l" marL="0" marR="0" indent="0">
                 <a:lnSpc>
-                  <a:spcPts val="1100"/>
+                  <a:spcPts val="1400"/>
                 </a:lnSpc>
                 <a:spcBef>
                   <a:spcPts val="0"/>
@@ -3673,7 +3673,7 @@
                 </a:spcAft>
               </a:pPr>
               <a:r>
-                <a:rPr sz="1100">
+                <a:rPr sz="1400">
                   <a:solidFill>
                     <a:srgbClr val="000000">
                       <a:alpha val="100000"/>
@@ -3695,7 +3695,7 @@
           </p:nvSpPr>
           <p:spPr>
             <a:xfrm>
-              <a:off x="3547476" y="2264798"/>
+              <a:off x="3323124" y="2407465"/>
               <a:ext cx="175564" cy="0"/>
             </a:xfrm>
             <a:custGeom>
@@ -3735,7 +3735,7 @@
           </p:nvSpPr>
           <p:spPr>
             <a:xfrm>
-              <a:off x="4788049" y="2264798"/>
+              <a:off x="4840953" y="2407465"/>
               <a:ext cx="175564" cy="0"/>
             </a:xfrm>
             <a:custGeom>
@@ -3775,8 +3775,8 @@
           </p:nvSpPr>
           <p:spPr>
             <a:xfrm>
-              <a:off x="3814575" y="2224748"/>
-              <a:ext cx="881938" cy="80101"/>
+              <a:off x="3609202" y="2356487"/>
+              <a:ext cx="1121237" cy="101955"/>
             </a:xfrm>
             <a:prstGeom prst="rect">
               <a:avLst/>
@@ -3789,7 +3789,7 @@
             <a:p>
               <a:pPr algn="l" marL="0" marR="0" indent="0">
                 <a:lnSpc>
-                  <a:spcPts val="880"/>
+                  <a:spcPts val="1120"/>
                 </a:lnSpc>
                 <a:spcBef>
                   <a:spcPts val="0"/>
@@ -3799,7 +3799,7 @@
                 </a:spcAft>
               </a:pPr>
               <a:r>
-                <a:rPr sz="880">
+                <a:rPr sz="1120">
                   <a:solidFill>
                     <a:srgbClr val="000000">
                       <a:alpha val="100000"/>
@@ -3821,8 +3821,8 @@
           </p:nvSpPr>
           <p:spPr>
             <a:xfrm>
-              <a:off x="5055148" y="2224748"/>
-              <a:ext cx="947226" cy="80101"/>
+              <a:off x="5127031" y="2356487"/>
+              <a:ext cx="1204173" cy="101955"/>
             </a:xfrm>
             <a:prstGeom prst="rect">
               <a:avLst/>
@@ -3835,7 +3835,7 @@
             <a:p>
               <a:pPr algn="l" marL="0" marR="0" indent="0">
                 <a:lnSpc>
-                  <a:spcPts val="880"/>
+                  <a:spcPts val="1120"/>
                 </a:lnSpc>
                 <a:spcBef>
                   <a:spcPts val="0"/>
@@ -3845,7 +3845,7 @@
                 </a:spcAft>
               </a:pPr>
               <a:r>
-                <a:rPr sz="880">
+                <a:rPr sz="1120">
                   <a:solidFill>
                     <a:srgbClr val="000000">
                       <a:alpha val="100000"/>
@@ -3867,8 +3867,8 @@
           </p:nvSpPr>
           <p:spPr>
             <a:xfrm>
-              <a:off x="910695" y="1896563"/>
-              <a:ext cx="3913906" cy="91165"/>
+              <a:off x="1034151" y="1977589"/>
+              <a:ext cx="4697455" cy="109362"/>
             </a:xfrm>
             <a:prstGeom prst="rect">
               <a:avLst/>
@@ -3881,7 +3881,7 @@
             <a:p>
               <a:pPr algn="l" marL="0" marR="0" indent="0">
                 <a:lnSpc>
-                  <a:spcPts val="1000"/>
+                  <a:spcPts val="1200"/>
                 </a:lnSpc>
                 <a:spcBef>
                   <a:spcPts val="0"/>
@@ -3891,7 +3891,7 @@
                 </a:spcAft>
               </a:pPr>
               <a:r>
-                <a:rPr sz="1000">
+                <a:rPr sz="1200">
                   <a:solidFill>
                     <a:srgbClr val="404040">
                       <a:alpha val="100000"/>
@@ -3913,8 +3913,8 @@
           </p:nvSpPr>
           <p:spPr>
             <a:xfrm>
-              <a:off x="910695" y="1669789"/>
-              <a:ext cx="2421056" cy="120152"/>
+              <a:off x="1034151" y="1688767"/>
+              <a:ext cx="3081985" cy="153070"/>
             </a:xfrm>
             <a:prstGeom prst="rect">
               <a:avLst/>
@@ -3927,7 +3927,7 @@
             <a:p>
               <a:pPr algn="l" marL="0" marR="0" indent="0">
                 <a:lnSpc>
-                  <a:spcPts val="1320"/>
+                  <a:spcPts val="1680"/>
                 </a:lnSpc>
                 <a:spcBef>
                   <a:spcPts val="0"/>
@@ -3937,7 +3937,7 @@
                 </a:spcAft>
               </a:pPr>
               <a:r>
-                <a:rPr sz="1320">
+                <a:rPr sz="1680">
                   <a:solidFill>
                     <a:srgbClr val="000000">
                       <a:alpha val="100000"/>
